--- a/D014/문제4_발표자료(C2).pptx
+++ b/D014/문제4_발표자료(C2).pptx
@@ -12913,7 +12913,7 @@
         </p:nvSpPr>
         <p:spPr>
           <a:xfrm>
-            <a:off x="518160" y="2109033"/>
+            <a:off x="499499" y="2351145"/>
             <a:ext cx="11058061" cy="646331"/>
           </a:xfrm>
           <a:prstGeom prst="rect">
@@ -12932,36 +12932,36 @@
               <a:t>Q1: </a:t>
             </a:r>
             <a:r>
-              <a:rPr lang="ko-KR" altLang="ko-KR" dirty="0"/>
+              <a:rPr lang="ko-KR" altLang="ko-KR" b="1" dirty="0"/>
               <a:t>'기대 </a:t>
             </a:r>
             <a:r>
-              <a:rPr lang="ko-KR" altLang="ko-KR" dirty="0" err="1"/>
+              <a:rPr lang="ko-KR" altLang="ko-KR" b="1" dirty="0" err="1"/>
               <a:t>빈도'는</a:t>
             </a:r>
             <a:r>
-              <a:rPr lang="ko-KR" altLang="ko-KR" dirty="0"/>
+              <a:rPr lang="ko-KR" altLang="ko-KR" b="1" dirty="0"/>
               <a:t> 어떤 의미를 가지며, '관측 </a:t>
             </a:r>
             <a:r>
-              <a:rPr lang="ko-KR" altLang="ko-KR" dirty="0" err="1"/>
+              <a:rPr lang="ko-KR" altLang="ko-KR" b="1" dirty="0" err="1"/>
               <a:t>빈도'와의</a:t>
             </a:r>
             <a:r>
-              <a:rPr lang="ko-KR" altLang="ko-KR" dirty="0"/>
+              <a:rPr lang="ko-KR" altLang="ko-KR" b="1" dirty="0"/>
               <a:t> 차이가 클수록 </a:t>
             </a:r>
             <a:r>
-              <a:rPr lang="ko-KR" altLang="ko-KR" dirty="0" err="1"/>
+              <a:rPr lang="ko-KR" altLang="ko-KR" b="1" dirty="0" err="1"/>
               <a:t>카이제곱</a:t>
             </a:r>
             <a:r>
-              <a:rPr lang="ko-KR" altLang="ko-KR" dirty="0"/>
+              <a:rPr lang="ko-KR" altLang="ko-KR" b="1" dirty="0"/>
               <a:t> 통계량은 어떻게 변할까요?</a:t>
             </a:r>
           </a:p>
           <a:p>
-            <a:endParaRPr lang="en-US" altLang="ko-KR" dirty="0"/>
+            <a:endParaRPr lang="en-US" altLang="ko-KR" b="1" dirty="0"/>
           </a:p>
         </p:txBody>
       </p:sp>
@@ -12980,13 +12980,13 @@
           <p:nvPr>
             <p:extLst>
               <p:ext uri="{D42A27DB-BD31-4B8C-83A1-F6EECF244321}">
-                <p14:modId xmlns:p14="http://schemas.microsoft.com/office/powerpoint/2010/main" val="2023693568"/>
+                <p14:modId xmlns:p14="http://schemas.microsoft.com/office/powerpoint/2010/main" val="1351002427"/>
               </p:ext>
             </p:extLst>
           </p:nvPr>
         </p:nvGraphicFramePr>
         <p:xfrm>
-          <a:off x="597660" y="3130483"/>
+          <a:off x="998883" y="3948602"/>
           <a:ext cx="3563619" cy="1225576"/>
         </p:xfrm>
         <a:graphic>
@@ -13249,7 +13249,7 @@
         </p:nvSpPr>
         <p:spPr>
           <a:xfrm>
-            <a:off x="518160" y="2644723"/>
+            <a:off x="1870936" y="3338686"/>
             <a:ext cx="1819511" cy="553998"/>
           </a:xfrm>
           <a:prstGeom prst="rect">
@@ -13310,8 +13310,8 @@
         </p:nvSpPr>
         <p:spPr>
           <a:xfrm>
-            <a:off x="3049361" y="3102875"/>
-            <a:ext cx="6098720" cy="619593"/>
+            <a:off x="4942380" y="3123017"/>
+            <a:ext cx="6098720" cy="3093154"/>
           </a:xfrm>
           <a:prstGeom prst="rect">
             <a:avLst/>
@@ -13324,212 +13324,135 @@
           </a:bodyPr>
           <a:lstStyle/>
           <a:p>
-            <a:pPr>
-              <a:lnSpc>
-                <a:spcPts val="1425"/>
-              </a:lnSpc>
-              <a:buNone/>
+            <a:endParaRPr lang="en-US" altLang="ko-KR" sz="1500" b="0" dirty="0">
+              <a:effectLst/>
+              <a:sym typeface="Wingdings" panose="05000000000000000000" pitchFamily="2" charset="2"/>
+            </a:endParaRPr>
+          </a:p>
+          <a:p>
+            <a:pPr marL="285750" indent="-285750">
+              <a:buFont typeface="Wingdings" panose="05000000000000000000" pitchFamily="2" charset="2"/>
+              <a:buChar char="à"/>
             </a:pPr>
             <a:r>
-              <a:rPr lang="ko-KR" altLang="ko-KR" sz="1050" b="0" dirty="0">
-                <a:solidFill>
-                  <a:srgbClr val="BBBEBF"/>
-                </a:solidFill>
+              <a:rPr lang="ko-KR" altLang="ko-KR" sz="1500" b="0" dirty="0">
                 <a:effectLst/>
-                <a:latin typeface="Consolas" panose="020B0609020204030204" pitchFamily="49" charset="0"/>
               </a:rPr>
               <a:t>기대 빈도는 "만약 연령대와 선호 장르가 정말 서로 독립(아무 관련 없음)이라면, 이론적으로 나와야 할 </a:t>
             </a:r>
             <a:r>
-              <a:rPr lang="ko-KR" altLang="ko-KR" sz="1050" b="0" dirty="0" err="1">
-                <a:solidFill>
-                  <a:srgbClr val="BBBEBF"/>
-                </a:solidFill>
+              <a:rPr lang="ko-KR" altLang="ko-KR" sz="1500" b="0" dirty="0" err="1">
                 <a:effectLst/>
-                <a:latin typeface="Consolas" panose="020B0609020204030204" pitchFamily="49" charset="0"/>
               </a:rPr>
               <a:t>빈도"를</a:t>
             </a:r>
             <a:r>
-              <a:rPr lang="ko-KR" altLang="ko-KR" sz="1050" b="0" dirty="0">
-                <a:solidFill>
-                  <a:srgbClr val="BBBEBF"/>
-                </a:solidFill>
+              <a:rPr lang="ko-KR" altLang="ko-KR" sz="1500" b="0" dirty="0">
                 <a:effectLst/>
-                <a:latin typeface="Consolas" panose="020B0609020204030204" pitchFamily="49" charset="0"/>
               </a:rPr>
               <a:t> 뜻한다. 예를 들어 20대-액션 칸의 기대 빈도(50.0)는, 전체 액션/로맨스 비율과 연령대 비율만 가지고 계산한 "우연히 예상되는 </a:t>
             </a:r>
             <a:r>
-              <a:rPr lang="ko-KR" altLang="ko-KR" sz="1050" b="0" dirty="0" err="1">
-                <a:solidFill>
-                  <a:srgbClr val="BBBEBF"/>
-                </a:solidFill>
+              <a:rPr lang="ko-KR" altLang="ko-KR" sz="1500" b="0" dirty="0" err="1">
                 <a:effectLst/>
-                <a:latin typeface="Consolas" panose="020B0609020204030204" pitchFamily="49" charset="0"/>
               </a:rPr>
               <a:t>값"이다</a:t>
             </a:r>
             <a:r>
-              <a:rPr lang="ko-KR" altLang="ko-KR" sz="1050" b="0" dirty="0">
-                <a:solidFill>
-                  <a:srgbClr val="BBBEBF"/>
-                </a:solidFill>
+              <a:rPr lang="ko-KR" altLang="ko-KR" sz="1500" b="0" dirty="0">
                 <a:effectLst/>
-                <a:latin typeface="Consolas" panose="020B0609020204030204" pitchFamily="49" charset="0"/>
               </a:rPr>
               <a:t>.</a:t>
             </a:r>
-          </a:p>
-        </p:txBody>
-      </p:sp>
-      <p:sp>
-        <p:nvSpPr>
-          <p:cNvPr id="19" name="TextBox 18">
-            <a:extLst>
-              <a:ext uri="{FF2B5EF4-FFF2-40B4-BE49-F238E27FC236}">
-                <a16:creationId xmlns:a16="http://schemas.microsoft.com/office/drawing/2014/main" id="{7F9EA17B-4291-F9A7-9E38-092185CBE330}"/>
-              </a:ext>
-            </a:extLst>
-          </p:cNvPr>
-          <p:cNvSpPr txBox="1"/>
-          <p:nvPr/>
-        </p:nvSpPr>
-        <p:spPr>
-          <a:xfrm>
-            <a:off x="3605320" y="4384369"/>
-            <a:ext cx="6098720" cy="1159292"/>
-          </a:xfrm>
-          <a:prstGeom prst="rect">
-            <a:avLst/>
-          </a:prstGeom>
-          <a:noFill/>
-        </p:spPr>
-        <p:txBody>
-          <a:bodyPr wrap="square">
-            <a:spAutoFit/>
-          </a:bodyPr>
-          <a:lstStyle/>
+            <a:endParaRPr lang="en-US" altLang="ko-KR" sz="1500" b="0" dirty="0">
+              <a:effectLst/>
+            </a:endParaRPr>
+          </a:p>
+          <a:p>
+            <a:pPr marL="285750" indent="-285750">
+              <a:buFont typeface="Wingdings" panose="05000000000000000000" pitchFamily="2" charset="2"/>
+              <a:buChar char="à"/>
+            </a:pPr>
+            <a:endParaRPr lang="en-US" altLang="ko-KR" sz="1500" dirty="0"/>
+          </a:p>
+          <a:p>
+            <a:pPr marL="285750" indent="-285750">
+              <a:buFont typeface="Wingdings" panose="05000000000000000000" pitchFamily="2" charset="2"/>
+              <a:buChar char="à"/>
+            </a:pPr>
+            <a:r>
+              <a:rPr lang="ko-KR" altLang="ko-KR" sz="1500" dirty="0"/>
+              <a:t>관측 빈도(실제 데이터)와 기대 빈도(독립 가정 시 </a:t>
+            </a:r>
+            <a:r>
+              <a:rPr lang="ko-KR" altLang="ko-KR" sz="1500" dirty="0" err="1"/>
+              <a:t>이론값</a:t>
+            </a:r>
+            <a:r>
+              <a:rPr lang="ko-KR" altLang="ko-KR" sz="1500" dirty="0"/>
+              <a:t>)의 차이가 클수록, </a:t>
+            </a:r>
+            <a:r>
+              <a:rPr lang="ko-KR" altLang="ko-KR" sz="1500" dirty="0" err="1"/>
+              <a:t>카이제곱</a:t>
+            </a:r>
+            <a:r>
+              <a:rPr lang="ko-KR" altLang="ko-KR" sz="1500" dirty="0"/>
+              <a:t> 통계량은 커진다.</a:t>
+            </a:r>
+            <a:endParaRPr lang="en-US" altLang="ko-KR" sz="1500" dirty="0"/>
+          </a:p>
+          <a:p>
+            <a:pPr marL="285750" indent="-285750">
+              <a:buFont typeface="Wingdings" panose="05000000000000000000" pitchFamily="2" charset="2"/>
+              <a:buChar char="à"/>
+            </a:pPr>
+            <a:endParaRPr lang="en-US" altLang="ko-KR" sz="1500" dirty="0"/>
+          </a:p>
+          <a:p>
+            <a:pPr marL="285750" indent="-285750">
+              <a:buFont typeface="Wingdings" panose="05000000000000000000" pitchFamily="2" charset="2"/>
+              <a:buChar char="à"/>
+            </a:pPr>
+            <a:r>
+              <a:rPr lang="ko-KR" altLang="ko-KR" sz="1500" dirty="0" err="1"/>
+              <a:t>카이제곱</a:t>
+            </a:r>
+            <a:r>
+              <a:rPr lang="ko-KR" altLang="ko-KR" sz="1500" dirty="0"/>
+              <a:t> 통계량 자체가 </a:t>
+            </a:r>
+            <a:r>
+              <a:rPr lang="en-US" altLang="ko-KR" sz="1500" dirty="0"/>
+              <a:t>“</a:t>
+            </a:r>
+            <a:r>
+              <a:rPr lang="ko-KR" altLang="ko-KR" sz="1500" dirty="0"/>
+              <a:t>(관측-기대)²/기대 값</a:t>
+            </a:r>
+            <a:r>
+              <a:rPr lang="en-US" altLang="ko-KR" sz="1500" dirty="0"/>
+              <a:t>”</a:t>
+            </a:r>
+            <a:r>
+              <a:rPr lang="ko-KR" altLang="ko-KR" sz="1500" dirty="0"/>
+              <a:t>들을 모두 더한 것이기 때문에, 두 값의 괴리가 클수록 "독립이라는 가정과 실제 데이터가 안 </a:t>
+            </a:r>
+            <a:r>
+              <a:rPr lang="ko-KR" altLang="ko-KR" sz="1500" dirty="0" err="1"/>
+              <a:t>맞는다"는</a:t>
+            </a:r>
+            <a:r>
+              <a:rPr lang="ko-KR" altLang="ko-KR" sz="1500" dirty="0"/>
+              <a:t> 신호가 강해지는 것이다.</a:t>
+            </a:r>
+          </a:p>
           <a:p>
             <a:pPr>
-              <a:lnSpc>
-                <a:spcPts val="1425"/>
-              </a:lnSpc>
               <a:buNone/>
             </a:pPr>
-            <a:r>
-              <a:rPr lang="ko-KR" altLang="ko-KR" sz="1050" b="0" dirty="0">
-                <a:solidFill>
-                  <a:srgbClr val="BBBEBF"/>
-                </a:solidFill>
-                <a:effectLst/>
-                <a:latin typeface="Consolas" panose="020B0609020204030204" pitchFamily="49" charset="0"/>
-              </a:rPr>
-              <a:t>관측 빈도(실제 데이터)와 기대 빈도(독립 가정 시 </a:t>
-            </a:r>
-            <a:r>
-              <a:rPr lang="ko-KR" altLang="ko-KR" sz="1050" b="0" dirty="0" err="1">
-                <a:solidFill>
-                  <a:srgbClr val="BBBEBF"/>
-                </a:solidFill>
-                <a:effectLst/>
-                <a:latin typeface="Consolas" panose="020B0609020204030204" pitchFamily="49" charset="0"/>
-              </a:rPr>
-              <a:t>이론값</a:t>
-            </a:r>
-            <a:r>
-              <a:rPr lang="ko-KR" altLang="ko-KR" sz="1050" b="0" dirty="0">
-                <a:solidFill>
-                  <a:srgbClr val="BBBEBF"/>
-                </a:solidFill>
-                <a:effectLst/>
-                <a:latin typeface="Consolas" panose="020B0609020204030204" pitchFamily="49" charset="0"/>
-              </a:rPr>
-              <a:t>)의 차이가 클수록, </a:t>
-            </a:r>
-            <a:r>
-              <a:rPr lang="ko-KR" altLang="ko-KR" sz="1050" b="0" dirty="0" err="1">
-                <a:solidFill>
-                  <a:srgbClr val="BBBEBF"/>
-                </a:solidFill>
-                <a:effectLst/>
-                <a:latin typeface="Consolas" panose="020B0609020204030204" pitchFamily="49" charset="0"/>
-              </a:rPr>
-              <a:t>카이제곱</a:t>
-            </a:r>
-            <a:r>
-              <a:rPr lang="ko-KR" altLang="ko-KR" sz="1050" b="0" dirty="0">
-                <a:solidFill>
-                  <a:srgbClr val="BBBEBF"/>
-                </a:solidFill>
-                <a:effectLst/>
-                <a:latin typeface="Consolas" panose="020B0609020204030204" pitchFamily="49" charset="0"/>
-              </a:rPr>
-              <a:t> 통계량은 커진다. </a:t>
-            </a:r>
-            <a:r>
-              <a:rPr lang="ko-KR" altLang="ko-KR" sz="1050" b="0" dirty="0" err="1">
-                <a:solidFill>
-                  <a:srgbClr val="BBBEBF"/>
-                </a:solidFill>
-                <a:effectLst/>
-                <a:latin typeface="Consolas" panose="020B0609020204030204" pitchFamily="49" charset="0"/>
-              </a:rPr>
-              <a:t>카이제곱</a:t>
-            </a:r>
-            <a:r>
-              <a:rPr lang="ko-KR" altLang="ko-KR" sz="1050" b="0" dirty="0">
-                <a:solidFill>
-                  <a:srgbClr val="BBBEBF"/>
-                </a:solidFill>
-                <a:effectLst/>
-                <a:latin typeface="Consolas" panose="020B0609020204030204" pitchFamily="49" charset="0"/>
-              </a:rPr>
-              <a:t> 통계량 자체가 (관측-기대)²/기대 값들을 모두 더한 것이기 때문에, 두 값의 괴리가 클수록 "독립이라는 가정과 실제 데이터가 안 </a:t>
-            </a:r>
-            <a:r>
-              <a:rPr lang="ko-KR" altLang="ko-KR" sz="1050" b="0" dirty="0" err="1">
-                <a:solidFill>
-                  <a:srgbClr val="BBBEBF"/>
-                </a:solidFill>
-                <a:effectLst/>
-                <a:latin typeface="Consolas" panose="020B0609020204030204" pitchFamily="49" charset="0"/>
-              </a:rPr>
-              <a:t>맞는다"는</a:t>
-            </a:r>
-            <a:r>
-              <a:rPr lang="ko-KR" altLang="ko-KR" sz="1050" b="0" dirty="0">
-                <a:solidFill>
-                  <a:srgbClr val="BBBEBF"/>
-                </a:solidFill>
-                <a:effectLst/>
-                <a:latin typeface="Consolas" panose="020B0609020204030204" pitchFamily="49" charset="0"/>
-              </a:rPr>
-              <a:t> 신호가 강해지는 것이다.</a:t>
-            </a:r>
-          </a:p>
-          <a:p>
-            <a:pPr>
-              <a:lnSpc>
-                <a:spcPts val="1425"/>
-              </a:lnSpc>
-              <a:buNone/>
-            </a:pPr>
-            <a:br>
-              <a:rPr lang="ko-KR" altLang="ko-KR" sz="1050" b="0" dirty="0">
-                <a:solidFill>
-                  <a:srgbClr val="BBBEBF"/>
-                </a:solidFill>
-                <a:effectLst/>
-                <a:latin typeface="Consolas" panose="020B0609020204030204" pitchFamily="49" charset="0"/>
-              </a:rPr>
-            </a:br>
-            <a:endParaRPr lang="ko-KR" altLang="ko-KR" sz="1050" b="0" dirty="0">
-              <a:solidFill>
-                <a:srgbClr val="BBBEBF"/>
-              </a:solidFill>
+            <a:endParaRPr lang="ko-KR" altLang="ko-KR" sz="1500" b="0" dirty="0">
               <a:effectLst/>
-              <a:latin typeface="Consolas" panose="020B0609020204030204" pitchFamily="49" charset="0"/>
             </a:endParaRPr>
           </a:p>
         </p:txBody>
@@ -13572,44 +13495,6 @@
       </p:grpSpPr>
       <p:sp>
         <p:nvSpPr>
-          <p:cNvPr id="2" name="제목 1">
-            <a:extLst>
-              <a:ext uri="{FF2B5EF4-FFF2-40B4-BE49-F238E27FC236}">
-                <a16:creationId xmlns:a16="http://schemas.microsoft.com/office/drawing/2014/main" id="{72F14517-CAA4-6E3F-07D5-E7231D720D90}"/>
-              </a:ext>
-            </a:extLst>
-          </p:cNvPr>
-          <p:cNvSpPr>
-            <a:spLocks noGrp="1"/>
-          </p:cNvSpPr>
-          <p:nvPr>
-            <p:ph type="title"/>
-          </p:nvPr>
-        </p:nvSpPr>
-        <p:spPr/>
-        <p:txBody>
-          <a:bodyPr rtlCol="0">
-            <a:normAutofit/>
-          </a:bodyPr>
-          <a:lstStyle/>
-          <a:p>
-            <a:r>
-              <a:rPr lang="ko-KR" altLang="en-US" sz="2400" dirty="0"/>
-              <a:t>🧠 데이터를 어떻게 읽을까요</a:t>
-            </a:r>
-            <a:r>
-              <a:rPr lang="en-US" altLang="ko-KR" sz="2400" dirty="0"/>
-              <a:t>?</a:t>
-            </a:r>
-            <a:br>
-              <a:rPr lang="en-US" altLang="ko-KR" sz="2400" dirty="0"/>
-            </a:br>
-            <a:endParaRPr lang="ko-KR" altLang="en-US" sz="2400" dirty="0"/>
-          </a:p>
-        </p:txBody>
-      </p:sp>
-      <p:sp>
-        <p:nvSpPr>
           <p:cNvPr id="9" name="바닥글 개체 틀 4">
             <a:extLst>
               <a:ext uri="{FF2B5EF4-FFF2-40B4-BE49-F238E27FC236}">
@@ -13705,7 +13590,7 @@
         </p:nvSpPr>
         <p:spPr>
           <a:xfrm>
-            <a:off x="436636" y="2289830"/>
+            <a:off x="566969" y="2287969"/>
             <a:ext cx="11058061" cy="923330"/>
           </a:xfrm>
           <a:prstGeom prst="rect">
@@ -13724,20 +13609,20 @@
               <a:t>Q2: </a:t>
             </a:r>
             <a:r>
-              <a:rPr lang="ko-KR" altLang="ko-KR" dirty="0"/>
+              <a:rPr lang="ko-KR" altLang="ko-KR" b="1" dirty="0"/>
               <a:t>Q4의 히스토그램은 어떤 분포를 시각화한 것인가요? 실제 관찰된 </a:t>
             </a:r>
             <a:r>
-              <a:rPr lang="ko-KR" altLang="ko-KR" dirty="0" err="1"/>
+              <a:rPr lang="ko-KR" altLang="ko-KR" b="1" dirty="0" err="1"/>
               <a:t>카이제곱</a:t>
             </a:r>
             <a:r>
-              <a:rPr lang="ko-KR" altLang="ko-KR" dirty="0"/>
+              <a:rPr lang="ko-KR" altLang="ko-KR" b="1" dirty="0"/>
               <a:t> 통계량(세로선)은 흔한 값인가요, 극단적인 값인가요?</a:t>
             </a:r>
           </a:p>
           <a:p>
-            <a:endParaRPr lang="en-US" altLang="ko-KR" dirty="0"/>
+            <a:endParaRPr lang="en-US" altLang="ko-KR" b="1" dirty="0"/>
           </a:p>
         </p:txBody>
       </p:sp>
@@ -13763,7 +13648,7 @@
         </p:blipFill>
         <p:spPr>
           <a:xfrm>
-            <a:off x="436636" y="3110517"/>
+            <a:off x="343330" y="3106695"/>
             <a:ext cx="5187696" cy="3348477"/>
           </a:xfrm>
           <a:prstGeom prst="rect">
@@ -13785,8 +13670,8 @@
         </p:nvSpPr>
         <p:spPr>
           <a:xfrm>
-            <a:off x="5829884" y="3564517"/>
-            <a:ext cx="6098720" cy="1015663"/>
+            <a:off x="5720403" y="3580604"/>
+            <a:ext cx="6098720" cy="2400657"/>
           </a:xfrm>
           <a:prstGeom prst="rect">
             <a:avLst/>
@@ -13799,150 +13684,142 @@
           </a:bodyPr>
           <a:lstStyle/>
           <a:p>
-            <a:pPr>
-              <a:buNone/>
+            <a:pPr marL="285750" indent="-285750">
+              <a:buFont typeface="Wingdings" panose="05000000000000000000" pitchFamily="2" charset="2"/>
+              <a:buChar char="à"/>
             </a:pPr>
-            <a:r>
-              <a:rPr lang="en-US" altLang="ko-KR" sz="1500" b="0" dirty="0">
-                <a:effectLst/>
-                <a:latin typeface="Consolas" panose="020B0609020204030204" pitchFamily="49" charset="0"/>
-                <a:sym typeface="Wingdings" panose="05000000000000000000" pitchFamily="2" charset="2"/>
-              </a:rPr>
-              <a:t> </a:t>
-            </a:r>
             <a:r>
               <a:rPr lang="ko-KR" altLang="ko-KR" sz="1500" b="0" dirty="0">
                 <a:effectLst/>
-                <a:latin typeface="Consolas" panose="020B0609020204030204" pitchFamily="49" charset="0"/>
               </a:rPr>
               <a:t>이 히스토그램은 "연령대와 선호 장르가 </a:t>
             </a:r>
             <a:r>
               <a:rPr lang="ko-KR" altLang="ko-KR" sz="1500" b="0" dirty="0" err="1">
                 <a:effectLst/>
-                <a:latin typeface="Consolas" panose="020B0609020204030204" pitchFamily="49" charset="0"/>
               </a:rPr>
               <a:t>독립이다"라는</a:t>
             </a:r>
             <a:r>
               <a:rPr lang="ko-KR" altLang="ko-KR" sz="1500" b="0" dirty="0">
                 <a:effectLst/>
-                <a:latin typeface="Consolas" panose="020B0609020204030204" pitchFamily="49" charset="0"/>
               </a:rPr>
               <a:t> 귀무가설이 참이라고 가정했을 때, 300명을 무작위로 반복 추출하여 나올 수 있는 </a:t>
             </a:r>
             <a:r>
               <a:rPr lang="ko-KR" altLang="ko-KR" sz="1500" b="0" dirty="0" err="1">
                 <a:effectLst/>
-                <a:latin typeface="Consolas" panose="020B0609020204030204" pitchFamily="49" charset="0"/>
               </a:rPr>
               <a:t>카이제곱</a:t>
             </a:r>
             <a:r>
               <a:rPr lang="ko-KR" altLang="ko-KR" sz="1500" b="0" dirty="0">
                 <a:effectLst/>
-                <a:latin typeface="Consolas" panose="020B0609020204030204" pitchFamily="49" charset="0"/>
               </a:rPr>
               <a:t> 통계량들의 분포(</a:t>
             </a:r>
             <a:r>
               <a:rPr lang="ko-KR" altLang="ko-KR" sz="1500" b="0" dirty="0" err="1">
                 <a:effectLst/>
-                <a:latin typeface="Consolas" panose="020B0609020204030204" pitchFamily="49" charset="0"/>
               </a:rPr>
               <a:t>카이제곱</a:t>
             </a:r>
             <a:r>
               <a:rPr lang="ko-KR" altLang="ko-KR" sz="1500" b="0" dirty="0">
                 <a:effectLst/>
-                <a:latin typeface="Consolas" panose="020B0609020204030204" pitchFamily="49" charset="0"/>
               </a:rPr>
               <a:t> 분포에 대한 시뮬레이션 근사)를 나타낸다.</a:t>
             </a:r>
-          </a:p>
-        </p:txBody>
-      </p:sp>
-      <p:sp>
-        <p:nvSpPr>
-          <p:cNvPr id="14" name="TextBox 13">
-            <a:extLst>
-              <a:ext uri="{FF2B5EF4-FFF2-40B4-BE49-F238E27FC236}">
-                <a16:creationId xmlns:a16="http://schemas.microsoft.com/office/drawing/2014/main" id="{1439C81B-3360-E326-3AF4-AE8D691FD6FF}"/>
-              </a:ext>
-            </a:extLst>
-          </p:cNvPr>
-          <p:cNvSpPr txBox="1"/>
-          <p:nvPr/>
+            <a:endParaRPr lang="en-US" altLang="ko-KR" sz="1500" b="0" dirty="0">
+              <a:effectLst/>
+            </a:endParaRPr>
+          </a:p>
+          <a:p>
+            <a:pPr marL="285750" indent="-285750">
+              <a:buFont typeface="Wingdings" panose="05000000000000000000" pitchFamily="2" charset="2"/>
+              <a:buChar char="à"/>
+            </a:pPr>
+            <a:endParaRPr lang="en-US" altLang="ko-KR" sz="1500" b="0" dirty="0">
+              <a:effectLst/>
+            </a:endParaRPr>
+          </a:p>
+          <a:p>
+            <a:pPr marL="285750" indent="-285750">
+              <a:buFont typeface="Wingdings" panose="05000000000000000000" pitchFamily="2" charset="2"/>
+              <a:buChar char="à"/>
+            </a:pPr>
+            <a:r>
+              <a:rPr lang="ko-KR" altLang="ko-KR" sz="1500" dirty="0"/>
+              <a:t>실제 관찰된 </a:t>
+            </a:r>
+            <a:r>
+              <a:rPr lang="ko-KR" altLang="ko-KR" sz="1500" dirty="0" err="1"/>
+              <a:t>카이제곱</a:t>
+            </a:r>
+            <a:r>
+              <a:rPr lang="ko-KR" altLang="ko-KR" sz="1500" dirty="0"/>
+              <a:t> 통계량(26.91)은 매우 극단적인 값이다. 분포 대부분이 0~10 사이에 몰려 있는데, </a:t>
+            </a:r>
+            <a:r>
+              <a:rPr lang="ko-KR" altLang="ko-KR" sz="1500" dirty="0" err="1"/>
+              <a:t>관찰값은</a:t>
+            </a:r>
+            <a:r>
+              <a:rPr lang="ko-KR" altLang="ko-KR" sz="1500" dirty="0"/>
+              <a:t> 그 범위를 훨씬 벗어난 오른쪽 끝에 위치해 있다. 즉 두 변수가 독립이라면 이런 값이 나오는 건 거의 불가능에 가깝다.</a:t>
+            </a:r>
+          </a:p>
+          <a:p>
+            <a:pPr marL="285750" indent="-285750">
+              <a:buFont typeface="Wingdings" panose="05000000000000000000" pitchFamily="2" charset="2"/>
+              <a:buChar char="à"/>
+            </a:pPr>
+            <a:endParaRPr lang="ko-KR" altLang="ko-KR" sz="1500" b="0" dirty="0">
+              <a:effectLst/>
+            </a:endParaRPr>
+          </a:p>
+        </p:txBody>
+      </p:sp>
+      <p:sp>
+        <p:nvSpPr>
+          <p:cNvPr id="17" name="제목 1">
+            <a:extLst>
+              <a:ext uri="{FF2B5EF4-FFF2-40B4-BE49-F238E27FC236}">
+                <a16:creationId xmlns:a16="http://schemas.microsoft.com/office/drawing/2014/main" id="{7DBAEE2B-D1A1-B6ED-E964-426B0412A03E}"/>
+              </a:ext>
+            </a:extLst>
+          </p:cNvPr>
+          <p:cNvSpPr>
+            <a:spLocks noGrp="1"/>
+          </p:cNvSpPr>
+          <p:nvPr>
+            <p:ph type="title"/>
+          </p:nvPr>
         </p:nvSpPr>
         <p:spPr>
           <a:xfrm>
-            <a:off x="5829884" y="4780934"/>
-            <a:ext cx="6098720" cy="1015663"/>
+            <a:off x="872972" y="763099"/>
+            <a:ext cx="10168128" cy="1179576"/>
           </a:xfrm>
-          <a:prstGeom prst="rect">
-            <a:avLst/>
-          </a:prstGeom>
-          <a:noFill/>
         </p:spPr>
         <p:txBody>
-          <a:bodyPr wrap="square">
-            <a:spAutoFit/>
+          <a:bodyPr rtlCol="0">
+            <a:normAutofit/>
           </a:bodyPr>
           <a:lstStyle/>
           <a:p>
-            <a:pPr>
-              <a:buNone/>
-            </a:pPr>
-            <a:r>
-              <a:rPr lang="en-US" altLang="ko-KR" sz="1500" b="0">
-                <a:effectLst/>
-                <a:latin typeface="Consolas" panose="020B0609020204030204" pitchFamily="49" charset="0"/>
-                <a:sym typeface="Wingdings" panose="05000000000000000000" pitchFamily="2" charset="2"/>
-              </a:rPr>
-              <a:t> </a:t>
-            </a:r>
-            <a:r>
-              <a:rPr lang="ko-KR" altLang="ko-KR" sz="1500" b="0">
-                <a:effectLst/>
-                <a:latin typeface="Consolas" panose="020B0609020204030204" pitchFamily="49" charset="0"/>
-              </a:rPr>
-              <a:t>실제 </a:t>
-            </a:r>
-            <a:r>
-              <a:rPr lang="ko-KR" altLang="ko-KR" sz="1500" b="0" dirty="0">
-                <a:effectLst/>
-                <a:latin typeface="Consolas" panose="020B0609020204030204" pitchFamily="49" charset="0"/>
-              </a:rPr>
-              <a:t>관찰된 </a:t>
-            </a:r>
-            <a:r>
-              <a:rPr lang="ko-KR" altLang="ko-KR" sz="1500" b="0" dirty="0" err="1">
-                <a:effectLst/>
-                <a:latin typeface="Consolas" panose="020B0609020204030204" pitchFamily="49" charset="0"/>
-              </a:rPr>
-              <a:t>카이제곱</a:t>
-            </a:r>
-            <a:r>
-              <a:rPr lang="ko-KR" altLang="ko-KR" sz="1500" b="0" dirty="0">
-                <a:effectLst/>
-                <a:latin typeface="Consolas" panose="020B0609020204030204" pitchFamily="49" charset="0"/>
-              </a:rPr>
-              <a:t> 통계량(26.91)은 매우 극단적인 값이다. 분포 대부분이 0~10 사이에 몰려 있는데, </a:t>
-            </a:r>
-            <a:r>
-              <a:rPr lang="ko-KR" altLang="ko-KR" sz="1500" b="0" dirty="0" err="1">
-                <a:effectLst/>
-                <a:latin typeface="Consolas" panose="020B0609020204030204" pitchFamily="49" charset="0"/>
-              </a:rPr>
-              <a:t>관찰값은</a:t>
-            </a:r>
-            <a:r>
-              <a:rPr lang="ko-KR" altLang="ko-KR" sz="1500" b="0" dirty="0">
-                <a:effectLst/>
-                <a:latin typeface="Consolas" panose="020B0609020204030204" pitchFamily="49" charset="0"/>
-              </a:rPr>
-              <a:t> 그 범위를 훨씬 벗어난 오른쪽 끝에 위치해 있다. 즉 두 변수가 독립이라면 이런 값이 나오는 건 거의 불가능에 가깝다.</a:t>
-            </a:r>
+            <a:r>
+              <a:rPr lang="ko-KR" altLang="en-US" sz="2400" dirty="0"/>
+              <a:t>🧠 데이터를 어떻게 읽을까요</a:t>
+            </a:r>
+            <a:r>
+              <a:rPr lang="en-US" altLang="ko-KR" sz="2400" dirty="0"/>
+              <a:t>?</a:t>
+            </a:r>
+            <a:br>
+              <a:rPr lang="en-US" altLang="ko-KR" sz="2400" dirty="0"/>
+            </a:br>
+            <a:endParaRPr lang="ko-KR" altLang="en-US" sz="2400" dirty="0"/>
           </a:p>
         </p:txBody>
       </p:sp>
@@ -13984,90 +13861,6 @@
       </p:grpSpPr>
       <p:sp>
         <p:nvSpPr>
-          <p:cNvPr id="2" name="제목 1">
-            <a:extLst>
-              <a:ext uri="{FF2B5EF4-FFF2-40B4-BE49-F238E27FC236}">
-                <a16:creationId xmlns:a16="http://schemas.microsoft.com/office/drawing/2014/main" id="{DC633CE5-6501-ACBE-2BC0-716A13C8BE72}"/>
-              </a:ext>
-            </a:extLst>
-          </p:cNvPr>
-          <p:cNvSpPr>
-            <a:spLocks noGrp="1"/>
-          </p:cNvSpPr>
-          <p:nvPr>
-            <p:ph type="title"/>
-          </p:nvPr>
-        </p:nvSpPr>
-        <p:spPr/>
-        <p:txBody>
-          <a:bodyPr rtlCol="0">
-            <a:normAutofit/>
-          </a:bodyPr>
-          <a:lstStyle/>
-          <a:p>
-            <a:r>
-              <a:rPr lang="ko-KR" altLang="en-US" sz="2400" dirty="0"/>
-              <a:t>🧠 데이터를 어떻게 읽을까요</a:t>
-            </a:r>
-            <a:r>
-              <a:rPr lang="en-US" altLang="ko-KR" sz="2400" dirty="0"/>
-              <a:t>?</a:t>
-            </a:r>
-            <a:br>
-              <a:rPr lang="en-US" altLang="ko-KR" sz="2400" dirty="0"/>
-            </a:br>
-            <a:endParaRPr lang="ko-KR" altLang="en-US" sz="2400" dirty="0"/>
-          </a:p>
-        </p:txBody>
-      </p:sp>
-      <p:sp>
-        <p:nvSpPr>
-          <p:cNvPr id="9" name="바닥글 개체 틀 4">
-            <a:extLst>
-              <a:ext uri="{FF2B5EF4-FFF2-40B4-BE49-F238E27FC236}">
-                <a16:creationId xmlns:a16="http://schemas.microsoft.com/office/drawing/2014/main" id="{C2FF177B-D6AE-282A-92BF-4FC362D05381}"/>
-              </a:ext>
-            </a:extLst>
-          </p:cNvPr>
-          <p:cNvSpPr>
-            <a:spLocks noGrp="1"/>
-          </p:cNvSpPr>
-          <p:nvPr>
-            <p:ph type="ftr" sz="quarter" idx="11"/>
-          </p:nvPr>
-        </p:nvSpPr>
-        <p:spPr/>
-        <p:txBody>
-          <a:bodyPr rtlCol="0"/>
-          <a:lstStyle/>
-          <a:p>
-            <a:pPr rtl="0"/>
-            <a:r>
-              <a:rPr lang="ko-KR" altLang="en-US" dirty="0">
-                <a:latin typeface="맑은 고딕" panose="020B0503020000020004" pitchFamily="50" charset="-127"/>
-                <a:ea typeface="맑은 고딕" panose="020B0503020000020004" pitchFamily="50" charset="-127"/>
-              </a:rPr>
-              <a:t>문제 </a:t>
-            </a:r>
-            <a:r>
-              <a:rPr lang="en-US" altLang="ko-KR" dirty="0">
-                <a:latin typeface="맑은 고딕" panose="020B0503020000020004" pitchFamily="50" charset="-127"/>
-                <a:ea typeface="맑은 고딕" panose="020B0503020000020004" pitchFamily="50" charset="-127"/>
-              </a:rPr>
-              <a:t>1. </a:t>
-            </a:r>
-            <a:r>
-              <a:rPr lang="ko-KR" altLang="en-US" dirty="0">
-                <a:latin typeface="맑은 고딕" panose="020B0503020000020004" pitchFamily="50" charset="-127"/>
-                <a:ea typeface="맑은 고딕" panose="020B0503020000020004" pitchFamily="50" charset="-127"/>
-              </a:rPr>
-              <a:t>표본조사 체험하기</a:t>
-            </a:r>
-          </a:p>
-        </p:txBody>
-      </p:sp>
-      <p:sp>
-        <p:nvSpPr>
           <p:cNvPr id="10" name="슬라이드 번호 개체 틀 5">
             <a:extLst>
               <a:ext uri="{FF2B5EF4-FFF2-40B4-BE49-F238E27FC236}">
@@ -14136,10 +13929,10 @@
               <a:t>Q3: </a:t>
             </a:r>
             <a:r>
-              <a:rPr lang="ko-KR" altLang="ko-KR" sz="1650" dirty="0"/>
+              <a:rPr lang="ko-KR" altLang="ko-KR" sz="1650" b="1" dirty="0"/>
               <a:t>유의수준 0.05에서, 연령대와 선호 장르 사이에 통계적으로 유의미한 연관성이 있다고 결론 내릴 수 있나요? 그 이유는 무엇인가요?</a:t>
             </a:r>
-            <a:endParaRPr lang="en-US" altLang="ko-KR" sz="1650" dirty="0"/>
+            <a:endParaRPr lang="en-US" altLang="ko-KR" sz="1650" b="1" dirty="0"/>
           </a:p>
           <a:p>
             <a:endParaRPr lang="en-US" altLang="ko-KR" sz="1650" dirty="0"/>
@@ -14150,16 +13943,23 @@
               <a:t>A4: </a:t>
             </a:r>
             <a:r>
-              <a:rPr lang="ko-KR" altLang="ko-KR" sz="1650" dirty="0" err="1">
-                <a:latin typeface="Consolas" panose="020B0609020204030204" pitchFamily="49" charset="0"/>
-              </a:rPr>
+              <a:rPr lang="ko-KR" altLang="ko-KR" sz="1500" dirty="0" err="1"/>
               <a:t>p-value</a:t>
             </a:r>
             <a:r>
-              <a:rPr lang="ko-KR" altLang="ko-KR" sz="1650" dirty="0">
-                <a:latin typeface="Consolas" panose="020B0609020204030204" pitchFamily="49" charset="0"/>
-              </a:rPr>
-              <a:t>(0.00000143)가 유의수준 0.05보다 훨씬 작기 때문에 귀무가설(독립이다)을 기각한다. 즉 연령대와 선호 장르 사이에는 우연이라고 보기 어려운, 통계적으로 유의미한 연관성이 존재한다.</a:t>
+              <a:rPr lang="ko-KR" altLang="ko-KR" sz="1500" dirty="0"/>
+              <a:t>(0.00000143)가 유의수준 0.05보다 훨씬 작기 때문에 귀무가설(독립이다)을 기각한다.</a:t>
+            </a:r>
+            <a:endParaRPr lang="en-US" altLang="ko-KR" sz="1500" dirty="0"/>
+          </a:p>
+          <a:p>
+            <a:r>
+              <a:rPr lang="en-US" altLang="ko-KR" sz="1500" dirty="0"/>
+              <a:t>        </a:t>
+            </a:r>
+            <a:r>
+              <a:rPr lang="ko-KR" altLang="ko-KR" sz="1500" dirty="0"/>
+              <a:t>즉 연령대와 선호 장르 사이에는 우연이라고 보기 어려운, 통계적으로 유의미한 연관성이 존재한다.</a:t>
             </a:r>
           </a:p>
           <a:p>
@@ -14187,8 +13987,8 @@
         </p:nvSpPr>
         <p:spPr>
           <a:xfrm>
-            <a:off x="518159" y="3499465"/>
-            <a:ext cx="11058061" cy="2631490"/>
+            <a:off x="518159" y="3424817"/>
+            <a:ext cx="11058061" cy="3254737"/>
           </a:xfrm>
           <a:prstGeom prst="rect">
             <a:avLst/>
@@ -14209,7 +14009,7 @@
               <a:t>Q4: </a:t>
             </a:r>
             <a:r>
-              <a:rPr lang="ko-KR" altLang="ko-KR" sz="1650" dirty="0"/>
+              <a:rPr lang="ko-KR" altLang="ko-KR" sz="1650" b="1" dirty="0"/>
               <a:t>이 결과를 바탕으로 영화관은 연령대별로 어떤 상영 전략이나 프로모션을 세울 수 있을까요?</a:t>
             </a:r>
           </a:p>
@@ -14226,73 +14026,194 @@
               <a:t> </a:t>
             </a:r>
             <a:r>
-              <a:rPr lang="ko-KR" altLang="ko-KR" sz="1650" dirty="0">
-                <a:latin typeface="Consolas" panose="020B0609020204030204" pitchFamily="49" charset="0"/>
-              </a:rPr>
-              <a:t>관측 빈도를 보면 20대는 액션(70명)을 로맨스(30명)보다 훨씬 선호하고, 40대는 반대로 로맨스(60명)를 액션(30명)보다 선호하는 뚜렷한 경향이 있다. 30대는 두 장르 선호도가 비슷하다(50 </a:t>
-            </a:r>
-            <a:r>
-              <a:rPr lang="ko-KR" altLang="ko-KR" sz="1650" dirty="0" err="1">
-                <a:latin typeface="Consolas" panose="020B0609020204030204" pitchFamily="49" charset="0"/>
-              </a:rPr>
+              <a:rPr lang="ko-KR" altLang="ko-KR" sz="1500" dirty="0"/>
+              <a:t>관측 빈도를 보면 20대는 액션(70명)을 로맨스(30명)보다 훨씬 선호하고, 40대는 반대로 로맨스(60명)를 액션(30명)보다</a:t>
+            </a:r>
+            <a:r>
+              <a:rPr lang="en-US" altLang="ko-KR" sz="1500" dirty="0"/>
+              <a:t> </a:t>
+            </a:r>
+            <a:r>
+              <a:rPr lang="ko-KR" altLang="ko-KR" sz="1500" dirty="0"/>
+              <a:t>선호하는 뚜렷한 경향이 있다. 30대는 두 장르 선호도가 비슷하다(50 </a:t>
+            </a:r>
+            <a:r>
+              <a:rPr lang="ko-KR" altLang="ko-KR" sz="1500" dirty="0" err="1"/>
               <a:t>vs</a:t>
             </a:r>
             <a:r>
-              <a:rPr lang="ko-KR" altLang="ko-KR" sz="1650" dirty="0">
-                <a:latin typeface="Consolas" panose="020B0609020204030204" pitchFamily="49" charset="0"/>
-              </a:rPr>
+              <a:rPr lang="ko-KR" altLang="ko-KR" sz="1500" dirty="0"/>
               <a:t> 60).</a:t>
             </a:r>
           </a:p>
           <a:p>
-            <a:endParaRPr lang="en-US" altLang="ko-KR" sz="1650" dirty="0"/>
-          </a:p>
-          <a:p>
-            <a:r>
-              <a:rPr lang="ko-KR" altLang="ko-KR" sz="1650" dirty="0"/>
-              <a:t>연령대와 선호 장르 간 유의미한 연관성이 확인된 만큼, 영화관은 </a:t>
-            </a:r>
-            <a:r>
-              <a:rPr lang="ko-KR" altLang="ko-KR" sz="1650" b="1" dirty="0"/>
-              <a:t>① 연령대별 타겟 프로모션</a:t>
-            </a:r>
-            <a:r>
-              <a:rPr lang="ko-KR" altLang="ko-KR" sz="1650" dirty="0"/>
-              <a:t>(20대-액션 </a:t>
-            </a:r>
-            <a:r>
-              <a:rPr lang="ko-KR" altLang="ko-KR" sz="1650" dirty="0" err="1"/>
+            <a:endParaRPr lang="en-US" altLang="ko-KR" sz="1500" dirty="0"/>
+          </a:p>
+          <a:p>
+            <a:r>
+              <a:rPr lang="ko-KR" altLang="ko-KR" sz="1500" dirty="0"/>
+              <a:t>연령대와 선호 장르 간 유의미한 연관성이 확인된 만큼, 영화관은</a:t>
+            </a:r>
+            <a:endParaRPr lang="en-US" altLang="ko-KR" sz="1500" dirty="0"/>
+          </a:p>
+          <a:p>
+            <a:endParaRPr lang="en-US" altLang="ko-KR" sz="1500" dirty="0"/>
+          </a:p>
+          <a:p>
+            <a:pPr>
+              <a:lnSpc>
+                <a:spcPct val="110000"/>
+              </a:lnSpc>
+            </a:pPr>
+            <a:r>
+              <a:rPr lang="ko-KR" altLang="ko-KR" sz="1500" dirty="0"/>
+              <a:t>① 연령대별 타겟 프로모션(20대-액션 </a:t>
+            </a:r>
+            <a:r>
+              <a:rPr lang="ko-KR" altLang="ko-KR" sz="1500" dirty="0" err="1"/>
               <a:t>굿즈·SNS</a:t>
             </a:r>
             <a:r>
-              <a:rPr lang="ko-KR" altLang="ko-KR" sz="1650" dirty="0"/>
-              <a:t> 이벤트, 40대-로맨스·커플 패키지), </a:t>
-            </a:r>
-            <a:r>
-              <a:rPr lang="ko-KR" altLang="ko-KR" sz="1650" b="1" dirty="0"/>
+              <a:rPr lang="ko-KR" altLang="ko-KR" sz="1500" dirty="0"/>
+              <a:t> 이벤트, 40대-로맨스·커플 패키지)</a:t>
+            </a:r>
+            <a:endParaRPr lang="en-US" altLang="ko-KR" sz="1500" dirty="0"/>
+          </a:p>
+          <a:p>
+            <a:pPr>
+              <a:lnSpc>
+                <a:spcPct val="110000"/>
+              </a:lnSpc>
+            </a:pPr>
+            <a:r>
+              <a:rPr lang="ko-KR" altLang="ko-KR" sz="1500" dirty="0"/>
               <a:t>② </a:t>
             </a:r>
             <a:r>
-              <a:rPr lang="ko-KR" altLang="ko-KR" sz="1650" b="1" dirty="0" err="1"/>
+              <a:rPr lang="ko-KR" altLang="ko-KR" sz="1500" dirty="0" err="1"/>
               <a:t>상영관·시간대</a:t>
             </a:r>
             <a:r>
-              <a:rPr lang="ko-KR" altLang="ko-KR" sz="1650" b="1" dirty="0"/>
-              <a:t> 배정 최적화</a:t>
-            </a:r>
-            <a:r>
-              <a:rPr lang="ko-KR" altLang="ko-KR" sz="1650" dirty="0"/>
-              <a:t>(선호 연령대가 몰리는 시간에 관련 장르 상영 비중 확대), </a:t>
-            </a:r>
-            <a:r>
-              <a:rPr lang="ko-KR" altLang="ko-KR" sz="1650" b="1" dirty="0"/>
-              <a:t>③ 데이터 기반 개인화 추천</a:t>
-            </a:r>
-            <a:r>
-              <a:rPr lang="ko-KR" altLang="ko-KR" sz="1650" dirty="0"/>
-              <a:t>(연령대별 선호 데이터를 멤버십에 반영한 맞춤 추천)이라는 세 방향으로 마케팅 전략을 세울 수 있다.</a:t>
-            </a:r>
-            <a:endParaRPr lang="en-US" altLang="ko-KR" sz="1650" dirty="0"/>
+              <a:rPr lang="ko-KR" altLang="ko-KR" sz="1500" dirty="0"/>
+              <a:t> 배정 최적화(선호 연령대가 몰리는 시간에 관련 장르 상영 비중 확대)</a:t>
+            </a:r>
+            <a:endParaRPr lang="en-US" altLang="ko-KR" sz="1500" dirty="0"/>
+          </a:p>
+          <a:p>
+            <a:pPr>
+              <a:lnSpc>
+                <a:spcPct val="110000"/>
+              </a:lnSpc>
+            </a:pPr>
+            <a:r>
+              <a:rPr lang="ko-KR" altLang="ko-KR" sz="1500" dirty="0"/>
+              <a:t>③ 데이터 기반 개인화 추천(연령대별 선호 데이터를 멤버십에 반영한 맞춤 추천)</a:t>
+            </a:r>
+            <a:endParaRPr lang="en-US" altLang="ko-KR" sz="1500" dirty="0"/>
+          </a:p>
+          <a:p>
+            <a:endParaRPr lang="en-US" altLang="ko-KR" sz="1500" dirty="0"/>
+          </a:p>
+          <a:p>
+            <a:r>
+              <a:rPr lang="ko-KR" altLang="ko-KR" sz="1500" dirty="0"/>
+              <a:t>이라는</a:t>
+            </a:r>
+            <a:r>
+              <a:rPr lang="en-US" altLang="ko-KR" sz="1500" dirty="0"/>
+              <a:t> </a:t>
+            </a:r>
+            <a:r>
+              <a:rPr lang="ko-KR" altLang="ko-KR" sz="1500" dirty="0"/>
+              <a:t>세 방향으로 마케팅 전략을 세울 수 있다.</a:t>
+            </a:r>
+            <a:endParaRPr lang="en-US" altLang="ko-KR" sz="1500" dirty="0"/>
+          </a:p>
+        </p:txBody>
+      </p:sp>
+      <p:cxnSp>
+        <p:nvCxnSpPr>
+          <p:cNvPr id="13" name="직선 연결선 12">
+            <a:extLst>
+              <a:ext uri="{FF2B5EF4-FFF2-40B4-BE49-F238E27FC236}">
+                <a16:creationId xmlns:a16="http://schemas.microsoft.com/office/drawing/2014/main" id="{E5AD171C-00A3-76F5-747C-DCE812FCA588}"/>
+              </a:ext>
+            </a:extLst>
+          </p:cNvPr>
+          <p:cNvCxnSpPr/>
+          <p:nvPr/>
+        </p:nvCxnSpPr>
+        <p:spPr>
+          <a:xfrm flipV="1">
+            <a:off x="518158" y="3499465"/>
+            <a:ext cx="11058061" cy="70465"/>
+          </a:xfrm>
+          <a:prstGeom prst="line">
+            <a:avLst/>
+          </a:prstGeom>
+          <a:ln>
+            <a:solidFill>
+              <a:schemeClr val="bg1">
+                <a:lumMod val="75000"/>
+              </a:schemeClr>
+            </a:solidFill>
+          </a:ln>
+        </p:spPr>
+        <p:style>
+          <a:lnRef idx="1">
+            <a:schemeClr val="accent1"/>
+          </a:lnRef>
+          <a:fillRef idx="0">
+            <a:schemeClr val="accent1"/>
+          </a:fillRef>
+          <a:effectRef idx="0">
+            <a:schemeClr val="accent1"/>
+          </a:effectRef>
+          <a:fontRef idx="minor">
+            <a:schemeClr val="tx1"/>
+          </a:fontRef>
+        </p:style>
+      </p:cxnSp>
+      <p:sp>
+        <p:nvSpPr>
+          <p:cNvPr id="16" name="제목 1">
+            <a:extLst>
+              <a:ext uri="{FF2B5EF4-FFF2-40B4-BE49-F238E27FC236}">
+                <a16:creationId xmlns:a16="http://schemas.microsoft.com/office/drawing/2014/main" id="{0E6AB70F-DDDC-1853-0AA7-DD2AE1CAABEB}"/>
+              </a:ext>
+            </a:extLst>
+          </p:cNvPr>
+          <p:cNvSpPr>
+            <a:spLocks noGrp="1"/>
+          </p:cNvSpPr>
+          <p:nvPr>
+            <p:ph type="title"/>
+          </p:nvPr>
+        </p:nvSpPr>
+        <p:spPr>
+          <a:xfrm>
+            <a:off x="872972" y="763099"/>
+            <a:ext cx="10168128" cy="1179576"/>
+          </a:xfrm>
+        </p:spPr>
+        <p:txBody>
+          <a:bodyPr rtlCol="0">
+            <a:normAutofit/>
+          </a:bodyPr>
+          <a:lstStyle/>
+          <a:p>
+            <a:r>
+              <a:rPr lang="ko-KR" altLang="en-US" sz="2400" dirty="0"/>
+              <a:t>🧠 데이터를 어떻게 읽을까요</a:t>
+            </a:r>
+            <a:r>
+              <a:rPr lang="en-US" altLang="ko-KR" sz="2400" dirty="0"/>
+              <a:t>?</a:t>
+            </a:r>
+            <a:br>
+              <a:rPr lang="en-US" altLang="ko-KR" sz="2400" dirty="0"/>
+            </a:br>
+            <a:endParaRPr lang="ko-KR" altLang="en-US" sz="2400" dirty="0"/>
           </a:p>
         </p:txBody>
       </p:sp>

--- a/D014/문제4_발표자료(C2).pptx
+++ b/D014/문제4_발표자료(C2).pptx
@@ -10322,7 +10322,7 @@
         </p:spPr>
         <p:txBody>
           <a:bodyPr vert="horz" lIns="91440" tIns="45720" rIns="91440" bIns="45720" rtlCol="0" anchor="ctr">
-            <a:normAutofit fontScale="97500"/>
+            <a:normAutofit fontScale="90000"/>
           </a:bodyPr>
           <a:lstStyle>
             <a:lvl1pPr algn="ctr" defTabSz="914400" rtl="0" eaLnBrk="1" latinLnBrk="1" hangingPunct="1">
@@ -10344,6 +10344,11 @@
             </a:lvl1pPr>
           </a:lstStyle>
           <a:p>
+            <a:pPr>
+              <a:lnSpc>
+                <a:spcPct val="130000"/>
+              </a:lnSpc>
+            </a:pPr>
             <a:r>
               <a:rPr lang="ko-KR" altLang="en-US" sz="2000" b="1" dirty="0">
                 <a:solidFill>
@@ -10478,6 +10483,11 @@
             </a:r>
           </a:p>
           <a:p>
+            <a:pPr>
+              <a:lnSpc>
+                <a:spcPct val="130000"/>
+              </a:lnSpc>
+            </a:pPr>
             <a:r>
               <a:rPr lang="ko-KR" altLang="ko-KR" sz="2000" dirty="0">
                 <a:solidFill>
@@ -10621,12 +10631,12 @@
         <p:spPr>
           <a:xfrm>
             <a:off x="5156096" y="3180321"/>
-            <a:ext cx="6000703" cy="2825496"/>
+            <a:ext cx="6365344" cy="2825496"/>
           </a:xfrm>
         </p:spPr>
         <p:txBody>
           <a:bodyPr rtlCol="0">
-            <a:normAutofit/>
+            <a:normAutofit fontScale="92500" lnSpcReduction="20000"/>
           </a:bodyPr>
           <a:lstStyle/>
           <a:p>
@@ -10688,13 +10698,24 @@
               <a:rPr lang="ko-KR" altLang="ko-KR" sz="1600" dirty="0"/>
               <a:t> 통계량, </a:t>
             </a:r>
+            <a:endParaRPr lang="en-US" altLang="ko-KR" sz="1600" dirty="0"/>
+          </a:p>
+          <a:p>
+            <a:r>
+              <a:rPr lang="en-US" altLang="ko-KR" sz="1600" dirty="0"/>
+              <a:t>      </a:t>
+            </a:r>
             <a:r>
               <a:rPr lang="ko-KR" altLang="ko-KR" sz="1600" dirty="0" err="1"/>
               <a:t>p</a:t>
             </a:r>
             <a:r>
+              <a:rPr lang="en-US" altLang="ko-KR" sz="1600" dirty="0"/>
+              <a:t>-value</a:t>
+            </a:r>
+            <a:r>
               <a:rPr lang="ko-KR" altLang="ko-KR" sz="1600" dirty="0"/>
-              <a:t>-값,</a:t>
+              <a:t>,</a:t>
             </a:r>
             <a:r>
               <a:rPr lang="en-US" altLang="ko-KR" sz="1600" dirty="0"/>
@@ -10748,7 +10769,34 @@
             </a:r>
             <a:r>
               <a:rPr lang="ko-KR" altLang="ko-KR" sz="1600" dirty="0"/>
-              <a:t>어떤 분할표들이 나타날 수 있는지 5,000번 시뮬레이션해 봅시다.</a:t>
+              <a:t>어떤 분할표들이</a:t>
+            </a:r>
+            <a:endParaRPr lang="en-US" altLang="ko-KR" sz="1600" dirty="0"/>
+          </a:p>
+          <a:p>
+            <a:r>
+              <a:rPr lang="en-US" altLang="ko-KR" sz="1600" dirty="0"/>
+              <a:t>      </a:t>
+            </a:r>
+            <a:r>
+              <a:rPr lang="ko-KR" altLang="ko-KR" sz="1600" dirty="0"/>
+              <a:t>나타날</a:t>
+            </a:r>
+            <a:r>
+              <a:rPr lang="en-US" altLang="ko-KR" sz="1600" dirty="0"/>
+              <a:t> </a:t>
+            </a:r>
+            <a:r>
+              <a:rPr lang="ko-KR" altLang="en-US" sz="1600" dirty="0"/>
+              <a:t>수</a:t>
+            </a:r>
+            <a:r>
+              <a:rPr lang="en-US" altLang="ko-KR" sz="1600" dirty="0"/>
+              <a:t> </a:t>
+            </a:r>
+            <a:r>
+              <a:rPr lang="ko-KR" altLang="ko-KR" sz="1600" dirty="0"/>
+              <a:t>있는지 5,000번 시뮬레이션해 봅시다.</a:t>
             </a:r>
             <a:endParaRPr lang="en-US" altLang="ko-KR" sz="1600" dirty="0"/>
           </a:p>
@@ -10775,7 +10823,15 @@
             </a:r>
             <a:r>
               <a:rPr lang="ko-KR" altLang="ko-KR" sz="1500" dirty="0"/>
-              <a:t> 통계량 분포와 실제 관찰된 </a:t>
+              <a:t> 통계량 분포와 실제 관찰된</a:t>
+            </a:r>
+            <a:endParaRPr lang="en-US" altLang="ko-KR" sz="1500" dirty="0"/>
+          </a:p>
+          <a:p>
+            <a:pPr marL="0" indent="0"/>
+            <a:r>
+              <a:rPr lang="en-US" altLang="ko-KR" sz="1500" dirty="0"/>
+              <a:t>      </a:t>
             </a:r>
             <a:r>
               <a:rPr lang="ko-KR" altLang="ko-KR" sz="1500" dirty="0" err="1"/>
@@ -11448,7 +11504,7 @@
             </a:r>
             <a:r>
               <a:rPr lang="en-US" altLang="ko-KR" sz="2000" dirty="0"/>
-              <a:t>)</a:t>
+              <a:t>) </a:t>
             </a:r>
             <a:r>
               <a:rPr lang="ko-KR" altLang="en-US" sz="2000" dirty="0"/>
@@ -11504,7 +11560,12 @@
             <p:ph type="title"/>
           </p:nvPr>
         </p:nvSpPr>
-        <p:spPr/>
+        <p:spPr>
+          <a:xfrm>
+            <a:off x="871728" y="546576"/>
+            <a:ext cx="10168128" cy="1179576"/>
+          </a:xfrm>
+        </p:spPr>
         <p:txBody>
           <a:bodyPr rtlCol="0">
             <a:normAutofit/>
@@ -11512,19 +11573,19 @@
           <a:lstStyle/>
           <a:p>
             <a:r>
-              <a:rPr lang="en-US" altLang="ko-KR" sz="2400" dirty="0"/>
+              <a:rPr lang="en-US" altLang="ko-KR" sz="3500" dirty="0"/>
               <a:t>Q1, Q2: </a:t>
             </a:r>
             <a:r>
-              <a:rPr lang="ko-KR" altLang="en-US" sz="2400" dirty="0"/>
+              <a:rPr lang="ko-KR" altLang="en-US" sz="3500" dirty="0"/>
               <a:t>가설설정 </a:t>
             </a:r>
             <a:r>
-              <a:rPr lang="en-US" altLang="ko-KR" sz="2400" dirty="0"/>
+              <a:rPr lang="en-US" altLang="ko-KR" sz="3500" dirty="0"/>
               <a:t>&amp; </a:t>
             </a:r>
             <a:r>
-              <a:rPr lang="ko-KR" altLang="en-US" sz="2400" dirty="0"/>
+              <a:rPr lang="ko-KR" altLang="en-US" sz="3500" dirty="0"/>
               <a:t>기대빈도 구하기</a:t>
             </a:r>
           </a:p>
@@ -12624,13 +12685,23 @@
             <p:ph type="title"/>
           </p:nvPr>
         </p:nvSpPr>
-        <p:spPr/>
+        <p:spPr>
+          <a:xfrm>
+            <a:off x="969264" y="589280"/>
+            <a:ext cx="10314432" cy="1179576"/>
+          </a:xfrm>
+        </p:spPr>
         <p:txBody>
           <a:bodyPr rtlCol="0">
             <a:normAutofit/>
           </a:bodyPr>
           <a:lstStyle/>
           <a:p>
+            <a:pPr>
+              <a:lnSpc>
+                <a:spcPct val="130000"/>
+              </a:lnSpc>
+            </a:pPr>
             <a:r>
               <a:rPr lang="en-US" altLang="ko-KR" sz="2400" dirty="0"/>
               <a:t>Q3. </a:t>
@@ -12802,17 +12873,17 @@
           <a:lstStyle/>
           <a:p>
             <a:r>
-              <a:rPr lang="ko-KR" altLang="en-US" sz="2400" dirty="0"/>
+              <a:rPr lang="ko-KR" altLang="en-US" sz="2700" dirty="0"/>
               <a:t>🧠 데이터를 어떻게 읽을까요</a:t>
             </a:r>
             <a:r>
-              <a:rPr lang="en-US" altLang="ko-KR" sz="2400" dirty="0"/>
+              <a:rPr lang="en-US" altLang="ko-KR" sz="2700" dirty="0"/>
               <a:t>?</a:t>
             </a:r>
             <a:br>
-              <a:rPr lang="en-US" altLang="ko-KR" sz="2400" dirty="0"/>
+              <a:rPr lang="en-US" altLang="ko-KR" sz="2700" dirty="0"/>
             </a:br>
-            <a:endParaRPr lang="ko-KR" altLang="en-US" sz="2400" dirty="0"/>
+            <a:endParaRPr lang="ko-KR" altLang="en-US" sz="2700" dirty="0"/>
           </a:p>
         </p:txBody>
       </p:sp>
@@ -13782,44 +13853,63 @@
       </p:sp>
       <p:sp>
         <p:nvSpPr>
-          <p:cNvPr id="17" name="제목 1">
-            <a:extLst>
-              <a:ext uri="{FF2B5EF4-FFF2-40B4-BE49-F238E27FC236}">
-                <a16:creationId xmlns:a16="http://schemas.microsoft.com/office/drawing/2014/main" id="{7DBAEE2B-D1A1-B6ED-E964-426B0412A03E}"/>
-              </a:ext>
-            </a:extLst>
-          </p:cNvPr>
-          <p:cNvSpPr>
-            <a:spLocks noGrp="1"/>
-          </p:cNvSpPr>
-          <p:nvPr>
-            <p:ph type="title"/>
-          </p:nvPr>
+          <p:cNvPr id="20" name="제목 1">
+            <a:extLst>
+              <a:ext uri="{FF2B5EF4-FFF2-40B4-BE49-F238E27FC236}">
+                <a16:creationId xmlns:a16="http://schemas.microsoft.com/office/drawing/2014/main" id="{64212755-8188-F1A3-9B5B-BE1966E26EEE}"/>
+              </a:ext>
+            </a:extLst>
+          </p:cNvPr>
+          <p:cNvSpPr txBox="1">
+            <a:spLocks/>
+          </p:cNvSpPr>
+          <p:nvPr/>
         </p:nvSpPr>
         <p:spPr>
           <a:xfrm>
             <a:off x="872972" y="763099"/>
             <a:ext cx="10168128" cy="1179576"/>
           </a:xfrm>
+          <a:prstGeom prst="rect">
+            <a:avLst/>
+          </a:prstGeom>
         </p:spPr>
         <p:txBody>
-          <a:bodyPr rtlCol="0">
+          <a:bodyPr vert="horz" lIns="91440" tIns="45720" rIns="91440" bIns="45720" rtlCol="0" anchor="ctr">
             <a:normAutofit/>
           </a:bodyPr>
-          <a:lstStyle/>
-          <a:p>
-            <a:r>
-              <a:rPr lang="ko-KR" altLang="en-US" sz="2400" dirty="0"/>
+          <a:lstStyle>
+            <a:lvl1pPr algn="l" defTabSz="914400" rtl="0" eaLnBrk="1" latinLnBrk="1" hangingPunct="1">
+              <a:lnSpc>
+                <a:spcPct val="90000"/>
+              </a:lnSpc>
+              <a:spcBef>
+                <a:spcPct val="0"/>
+              </a:spcBef>
+              <a:buNone/>
+              <a:defRPr sz="4000" kern="1200">
+                <a:solidFill>
+                  <a:schemeClr val="tx1"/>
+                </a:solidFill>
+                <a:latin typeface="맑은 고딕" panose="020B0503020000020004" pitchFamily="50" charset="-127"/>
+                <a:ea typeface="맑은 고딕" panose="020B0503020000020004" pitchFamily="50" charset="-127"/>
+                <a:cs typeface="+mj-cs"/>
+              </a:defRPr>
+            </a:lvl1pPr>
+          </a:lstStyle>
+          <a:p>
+            <a:r>
+              <a:rPr lang="ko-KR" altLang="en-US" sz="2700"/>
               <a:t>🧠 데이터를 어떻게 읽을까요</a:t>
             </a:r>
             <a:r>
-              <a:rPr lang="en-US" altLang="ko-KR" sz="2400" dirty="0"/>
+              <a:rPr lang="en-US" altLang="ko-KR" sz="2700"/>
               <a:t>?</a:t>
             </a:r>
             <a:br>
-              <a:rPr lang="en-US" altLang="ko-KR" sz="2400" dirty="0"/>
+              <a:rPr lang="en-US" altLang="ko-KR" sz="2700"/>
             </a:br>
-            <a:endParaRPr lang="ko-KR" altLang="en-US" sz="2400" dirty="0"/>
+            <a:endParaRPr lang="ko-KR" altLang="en-US" sz="2700" dirty="0"/>
           </a:p>
         </p:txBody>
       </p:sp>
@@ -13988,7 +14078,7 @@
         <p:spPr>
           <a:xfrm>
             <a:off x="518159" y="3424817"/>
-            <a:ext cx="11058061" cy="3254737"/>
+            <a:ext cx="11058061" cy="3351687"/>
           </a:xfrm>
           <a:prstGeom prst="rect">
             <a:avLst/>
@@ -14017,6 +14107,11 @@
             <a:endParaRPr lang="en-US" altLang="ko-KR" sz="1650" dirty="0"/>
           </a:p>
           <a:p>
+            <a:pPr>
+              <a:lnSpc>
+                <a:spcPct val="120000"/>
+              </a:lnSpc>
+            </a:pPr>
             <a:r>
               <a:rPr lang="en-US" altLang="ko-KR" sz="1650" b="1" dirty="0"/>
               <a:t>A4:</a:t>
@@ -14027,7 +14122,26 @@
             </a:r>
             <a:r>
               <a:rPr lang="ko-KR" altLang="ko-KR" sz="1500" dirty="0"/>
-              <a:t>관측 빈도를 보면 20대는 액션(70명)을 로맨스(30명)보다 훨씬 선호하고, 40대는 반대로 로맨스(60명)를 액션(30명)보다</a:t>
+              <a:t>관측 빈도를 보면 20대는 액션(70명)을 로맨스(30명)보다 훨씬 선호하고,</a:t>
+            </a:r>
+            <a:r>
+              <a:rPr lang="en-US" altLang="ko-KR" sz="1500" dirty="0"/>
+              <a:t> </a:t>
+            </a:r>
+          </a:p>
+          <a:p>
+            <a:pPr>
+              <a:lnSpc>
+                <a:spcPct val="120000"/>
+              </a:lnSpc>
+            </a:pPr>
+            <a:r>
+              <a:rPr lang="en-US" altLang="ko-KR" sz="1500" dirty="0"/>
+              <a:t>         </a:t>
+            </a:r>
+            <a:r>
+              <a:rPr lang="ko-KR" altLang="ko-KR" sz="1500" dirty="0"/>
+              <a:t>40대는 반대로 로맨스(60명)를 액션(30명)보다</a:t>
             </a:r>
             <a:r>
               <a:rPr lang="en-US" altLang="ko-KR" sz="1500" dirty="0"/>
@@ -14176,44 +14290,63 @@
       </p:cxnSp>
       <p:sp>
         <p:nvSpPr>
-          <p:cNvPr id="16" name="제목 1">
-            <a:extLst>
-              <a:ext uri="{FF2B5EF4-FFF2-40B4-BE49-F238E27FC236}">
-                <a16:creationId xmlns:a16="http://schemas.microsoft.com/office/drawing/2014/main" id="{0E6AB70F-DDDC-1853-0AA7-DD2AE1CAABEB}"/>
-              </a:ext>
-            </a:extLst>
-          </p:cNvPr>
-          <p:cNvSpPr>
-            <a:spLocks noGrp="1"/>
-          </p:cNvSpPr>
-          <p:nvPr>
-            <p:ph type="title"/>
-          </p:nvPr>
+          <p:cNvPr id="19" name="제목 1">
+            <a:extLst>
+              <a:ext uri="{FF2B5EF4-FFF2-40B4-BE49-F238E27FC236}">
+                <a16:creationId xmlns:a16="http://schemas.microsoft.com/office/drawing/2014/main" id="{85550DD5-C0B4-8618-7DC5-5C55EDAA402A}"/>
+              </a:ext>
+            </a:extLst>
+          </p:cNvPr>
+          <p:cNvSpPr txBox="1">
+            <a:spLocks/>
+          </p:cNvSpPr>
+          <p:nvPr/>
         </p:nvSpPr>
         <p:spPr>
           <a:xfrm>
             <a:off x="872972" y="763099"/>
             <a:ext cx="10168128" cy="1179576"/>
           </a:xfrm>
+          <a:prstGeom prst="rect">
+            <a:avLst/>
+          </a:prstGeom>
         </p:spPr>
         <p:txBody>
-          <a:bodyPr rtlCol="0">
+          <a:bodyPr vert="horz" lIns="91440" tIns="45720" rIns="91440" bIns="45720" rtlCol="0" anchor="ctr">
             <a:normAutofit/>
           </a:bodyPr>
-          <a:lstStyle/>
-          <a:p>
-            <a:r>
-              <a:rPr lang="ko-KR" altLang="en-US" sz="2400" dirty="0"/>
+          <a:lstStyle>
+            <a:lvl1pPr algn="l" defTabSz="914400" rtl="0" eaLnBrk="1" latinLnBrk="1" hangingPunct="1">
+              <a:lnSpc>
+                <a:spcPct val="90000"/>
+              </a:lnSpc>
+              <a:spcBef>
+                <a:spcPct val="0"/>
+              </a:spcBef>
+              <a:buNone/>
+              <a:defRPr sz="4000" kern="1200">
+                <a:solidFill>
+                  <a:schemeClr val="tx1"/>
+                </a:solidFill>
+                <a:latin typeface="맑은 고딕" panose="020B0503020000020004" pitchFamily="50" charset="-127"/>
+                <a:ea typeface="맑은 고딕" panose="020B0503020000020004" pitchFamily="50" charset="-127"/>
+                <a:cs typeface="+mj-cs"/>
+              </a:defRPr>
+            </a:lvl1pPr>
+          </a:lstStyle>
+          <a:p>
+            <a:r>
+              <a:rPr lang="ko-KR" altLang="en-US" sz="2700"/>
               <a:t>🧠 데이터를 어떻게 읽을까요</a:t>
             </a:r>
             <a:r>
-              <a:rPr lang="en-US" altLang="ko-KR" sz="2400" dirty="0"/>
+              <a:rPr lang="en-US" altLang="ko-KR" sz="2700"/>
               <a:t>?</a:t>
             </a:r>
             <a:br>
-              <a:rPr lang="en-US" altLang="ko-KR" sz="2400" dirty="0"/>
+              <a:rPr lang="en-US" altLang="ko-KR" sz="2700"/>
             </a:br>
-            <a:endParaRPr lang="ko-KR" altLang="en-US" sz="2400" dirty="0"/>
+            <a:endParaRPr lang="ko-KR" altLang="en-US" sz="2700" dirty="0"/>
           </a:p>
         </p:txBody>
       </p:sp>
@@ -14319,7 +14452,9 @@
         </p:nvSpPr>
         <p:spPr/>
         <p:txBody>
-          <a:bodyPr rtlCol="0"/>
+          <a:bodyPr rtlCol="0">
+            <a:normAutofit fontScale="92500"/>
+          </a:bodyPr>
           <a:lstStyle/>
           <a:p>
             <a:pPr rtl="0"/>
@@ -14333,7 +14468,15 @@
             </a:r>
             <a:r>
               <a:rPr lang="en-US" altLang="ko-KR" dirty="0"/>
-              <a:t>, </a:t>
+              <a:t>(</a:t>
+            </a:r>
+            <a:r>
+              <a:rPr lang="ko-KR" altLang="en-US" dirty="0"/>
+              <a:t>발표</a:t>
+            </a:r>
+            <a:r>
+              <a:rPr lang="en-US" altLang="ko-KR"/>
+              <a:t>), </a:t>
             </a:r>
             <a:r>
               <a:rPr lang="ko-KR" altLang="en-US" dirty="0" err="1"/>

--- a/D014/문제4_발표자료(C2).pptx
+++ b/D014/문제4_발표자료(C2).pptx
@@ -10229,7 +10229,7 @@
         </p:spPr>
         <p:txBody>
           <a:bodyPr rtlCol="0">
-            <a:normAutofit fontScale="77500" lnSpcReduction="20000"/>
+            <a:normAutofit fontScale="92500"/>
           </a:bodyPr>
           <a:lstStyle/>
           <a:p>
@@ -10276,15 +10276,7 @@
             </a:r>
             <a:r>
               <a:rPr lang="en-US" altLang="ko-KR" dirty="0"/>
-              <a:t>(</a:t>
-            </a:r>
-            <a:r>
-              <a:rPr lang="ko-KR" altLang="en-US" dirty="0" err="1"/>
-              <a:t>피피티</a:t>
-            </a:r>
-            <a:r>
-              <a:rPr lang="en-US" altLang="ko-KR" dirty="0"/>
-              <a:t>), </a:t>
+              <a:t>, </a:t>
             </a:r>
             <a:r>
               <a:rPr lang="ko-KR" altLang="en-US" dirty="0"/>
@@ -10987,15 +10979,17 @@
         </p:nvSpPr>
         <p:spPr/>
         <p:txBody>
-          <a:bodyPr rtlCol="0"/>
+          <a:bodyPr rtlCol="0">
+            <a:normAutofit/>
+          </a:bodyPr>
           <a:lstStyle/>
           <a:p>
             <a:pPr rtl="0"/>
             <a:r>
-              <a:rPr lang="ko-KR" altLang="en-US" dirty="0"/>
+              <a:rPr lang="ko-KR" altLang="en-US" sz="3000" dirty="0"/>
               <a:t>관측 데이터 생성</a:t>
             </a:r>
-            <a:endParaRPr lang="ko-KR" altLang="en-US" dirty="0">
+            <a:endParaRPr lang="ko-KR" altLang="en-US" sz="3000" dirty="0">
               <a:latin typeface="맑은 고딕" panose="020B0503020000020004" pitchFamily="50" charset="-127"/>
               <a:ea typeface="맑은 고딕" panose="020B0503020000020004" pitchFamily="50" charset="-127"/>
             </a:endParaRPr>
@@ -11029,7 +11023,7 @@
                 <a:latin typeface="맑은 고딕" panose="020B0503020000020004" pitchFamily="50" charset="-127"/>
                 <a:ea typeface="맑은 고딕" panose="020B0503020000020004" pitchFamily="50" charset="-127"/>
               </a:rPr>
-              <a:t>문제</a:t>
+              <a:t>문제 </a:t>
             </a:r>
             <a:r>
               <a:rPr lang="en-US" altLang="ko-KR" dirty="0">
@@ -11130,13 +11124,13 @@
           <p:nvPr>
             <p:extLst>
               <p:ext uri="{D42A27DB-BD31-4B8C-83A1-F6EECF244321}">
-                <p14:modId xmlns:p14="http://schemas.microsoft.com/office/powerpoint/2010/main" val="375010036"/>
+                <p14:modId xmlns:p14="http://schemas.microsoft.com/office/powerpoint/2010/main" val="2730900049"/>
               </p:ext>
             </p:extLst>
           </p:nvPr>
         </p:nvGraphicFramePr>
         <p:xfrm>
-          <a:off x="6641085" y="2687320"/>
+          <a:off x="6641085" y="2758440"/>
           <a:ext cx="4642611" cy="1483360"/>
         </p:xfrm>
         <a:graphic>
@@ -11573,66 +11567,20 @@
           <a:lstStyle/>
           <a:p>
             <a:r>
-              <a:rPr lang="en-US" altLang="ko-KR" sz="3500" dirty="0"/>
+              <a:rPr lang="en-US" altLang="ko-KR" sz="3000" dirty="0"/>
               <a:t>Q1, Q2: </a:t>
             </a:r>
             <a:r>
-              <a:rPr lang="ko-KR" altLang="en-US" sz="3500" dirty="0"/>
+              <a:rPr lang="ko-KR" altLang="en-US" sz="3000" dirty="0"/>
               <a:t>가설설정 </a:t>
             </a:r>
             <a:r>
-              <a:rPr lang="en-US" altLang="ko-KR" sz="3500" dirty="0"/>
+              <a:rPr lang="en-US" altLang="ko-KR" sz="3000" dirty="0"/>
               <a:t>&amp; </a:t>
             </a:r>
             <a:r>
-              <a:rPr lang="ko-KR" altLang="en-US" sz="3500" dirty="0"/>
+              <a:rPr lang="ko-KR" altLang="en-US" sz="3000" dirty="0"/>
               <a:t>기대빈도 구하기</a:t>
-            </a:r>
-          </a:p>
-        </p:txBody>
-      </p:sp>
-      <p:sp>
-        <p:nvSpPr>
-          <p:cNvPr id="9" name="바닥글 개체 틀 4">
-            <a:extLst>
-              <a:ext uri="{FF2B5EF4-FFF2-40B4-BE49-F238E27FC236}">
-                <a16:creationId xmlns:a16="http://schemas.microsoft.com/office/drawing/2014/main" id="{948F1280-0C85-421E-BF0E-DB3DAF29F39A}"/>
-              </a:ext>
-            </a:extLst>
-          </p:cNvPr>
-          <p:cNvSpPr>
-            <a:spLocks noGrp="1"/>
-          </p:cNvSpPr>
-          <p:nvPr>
-            <p:ph type="ftr" sz="quarter" idx="11"/>
-          </p:nvPr>
-        </p:nvSpPr>
-        <p:spPr/>
-        <p:txBody>
-          <a:bodyPr rtlCol="0"/>
-          <a:lstStyle/>
-          <a:p>
-            <a:pPr rtl="0"/>
-            <a:r>
-              <a:rPr lang="ko-KR" altLang="en-US" dirty="0">
-                <a:latin typeface="맑은 고딕" panose="020B0503020000020004" pitchFamily="50" charset="-127"/>
-                <a:ea typeface="맑은 고딕" panose="020B0503020000020004" pitchFamily="50" charset="-127"/>
-              </a:rPr>
-              <a:t>문제 </a:t>
-            </a:r>
-            <a:r>
-              <a:rPr lang="en-US" altLang="ko-KR" dirty="0">
-                <a:latin typeface="맑은 고딕" panose="020B0503020000020004" pitchFamily="50" charset="-127"/>
-                <a:ea typeface="맑은 고딕" panose="020B0503020000020004" pitchFamily="50" charset="-127"/>
-              </a:rPr>
-              <a:t>1. </a:t>
-            </a:r>
-            <a:r>
-              <a:rPr lang="ko-KR" altLang="en-US" dirty="0">
-                <a:latin typeface="맑은 고딕" panose="020B0503020000020004" pitchFamily="50" charset="-127"/>
-                <a:ea typeface="맑은 고딕" panose="020B0503020000020004" pitchFamily="50" charset="-127"/>
-              </a:rPr>
-              <a:t>표본조사 체험하기</a:t>
             </a:r>
           </a:p>
         </p:txBody>
@@ -12340,7 +12288,7 @@
         </p:nvSpPr>
         <p:spPr>
           <a:xfrm>
-            <a:off x="6667211" y="5868050"/>
+            <a:off x="6592566" y="5817837"/>
             <a:ext cx="5416222" cy="276999"/>
           </a:xfrm>
           <a:prstGeom prst="rect">
@@ -12505,46 +12453,18 @@
           </a:lstStyle>
           <a:p>
             <a:r>
-              <a:rPr lang="en-US" altLang="ko-KR" sz="1800" dirty="0">
-                <a:solidFill>
-                  <a:schemeClr val="tx1">
-                    <a:lumMod val="50000"/>
-                    <a:lumOff val="50000"/>
-                  </a:schemeClr>
-                </a:solidFill>
-              </a:rPr>
+              <a:rPr lang="en-US" altLang="ko-KR" sz="1800" dirty="0"/>
               <a:t>&lt;</a:t>
             </a:r>
             <a:r>
-              <a:rPr lang="ko-KR" altLang="en-US" sz="1800" dirty="0">
-                <a:solidFill>
-                  <a:schemeClr val="tx1">
-                    <a:lumMod val="50000"/>
-                    <a:lumOff val="50000"/>
-                  </a:schemeClr>
-                </a:solidFill>
-              </a:rPr>
+              <a:rPr lang="ko-KR" altLang="en-US" sz="1800" dirty="0"/>
               <a:t>관측빈도</a:t>
             </a:r>
             <a:r>
-              <a:rPr lang="en-US" altLang="ko-KR" sz="1800" dirty="0">
-                <a:solidFill>
-                  <a:schemeClr val="tx1">
-                    <a:lumMod val="50000"/>
-                    <a:lumOff val="50000"/>
-                  </a:schemeClr>
-                </a:solidFill>
-              </a:rPr>
+              <a:rPr lang="en-US" altLang="ko-KR" sz="1800" dirty="0"/>
               <a:t>&gt;</a:t>
             </a:r>
-            <a:endParaRPr lang="ko-KR" altLang="en-US" sz="1800" dirty="0">
-              <a:solidFill>
-                <a:schemeClr val="tx1">
-                  <a:lumMod val="50000"/>
-                  <a:lumOff val="50000"/>
-                </a:schemeClr>
-              </a:solidFill>
-            </a:endParaRPr>
+            <a:endParaRPr lang="ko-KR" altLang="en-US" sz="1800" dirty="0"/>
           </a:p>
         </p:txBody>
       </p:sp>
@@ -12596,46 +12516,69 @@
           </a:lstStyle>
           <a:p>
             <a:r>
-              <a:rPr lang="en-US" altLang="ko-KR" sz="1800" dirty="0">
-                <a:solidFill>
-                  <a:schemeClr val="tx1">
-                    <a:lumMod val="50000"/>
-                    <a:lumOff val="50000"/>
-                  </a:schemeClr>
-                </a:solidFill>
+              <a:rPr lang="en-US" altLang="ko-KR" sz="1800" dirty="0"/>
+              <a:t>&lt;</a:t>
+            </a:r>
+            <a:r>
+              <a:rPr lang="ko-KR" altLang="en-US" sz="1800" dirty="0"/>
+              <a:t>기대빈도</a:t>
+            </a:r>
+            <a:r>
+              <a:rPr lang="en-US" altLang="ko-KR" sz="1800" dirty="0"/>
+              <a:t>&gt;</a:t>
+            </a:r>
+            <a:endParaRPr lang="ko-KR" altLang="en-US" sz="1800" dirty="0"/>
+          </a:p>
+        </p:txBody>
+      </p:sp>
+      <p:sp>
+        <p:nvSpPr>
+          <p:cNvPr id="19" name="바닥글 개체 틀 4">
+            <a:extLst>
+              <a:ext uri="{FF2B5EF4-FFF2-40B4-BE49-F238E27FC236}">
+                <a16:creationId xmlns:a16="http://schemas.microsoft.com/office/drawing/2014/main" id="{66E67008-BE67-B725-C3FB-AD10F0A43DD8}"/>
+              </a:ext>
+            </a:extLst>
+          </p:cNvPr>
+          <p:cNvSpPr>
+            <a:spLocks noGrp="1"/>
+          </p:cNvSpPr>
+          <p:nvPr>
+            <p:ph type="ftr" sz="quarter" idx="11"/>
+          </p:nvPr>
+        </p:nvSpPr>
+        <p:spPr>
+          <a:xfrm>
+            <a:off x="4038600" y="6356350"/>
+            <a:ext cx="4114800" cy="365125"/>
+          </a:xfrm>
+        </p:spPr>
+        <p:txBody>
+          <a:bodyPr rtlCol="0"/>
+          <a:lstStyle/>
+          <a:p>
+            <a:pPr rtl="0"/>
+            <a:r>
+              <a:rPr lang="ko-KR" altLang="en-US" dirty="0">
+                <a:latin typeface="맑은 고딕" panose="020B0503020000020004" pitchFamily="50" charset="-127"/>
+                <a:ea typeface="맑은 고딕" panose="020B0503020000020004" pitchFamily="50" charset="-127"/>
               </a:rPr>
-              <a:t>&lt;</a:t>
-            </a:r>
-            <a:r>
-              <a:rPr lang="ko-KR" altLang="en-US" sz="1800" dirty="0">
-                <a:solidFill>
-                  <a:schemeClr val="tx1">
-                    <a:lumMod val="50000"/>
-                    <a:lumOff val="50000"/>
-                  </a:schemeClr>
-                </a:solidFill>
+              <a:t>문제 </a:t>
+            </a:r>
+            <a:r>
+              <a:rPr lang="en-US" altLang="ko-KR" dirty="0">
+                <a:latin typeface="맑은 고딕" panose="020B0503020000020004" pitchFamily="50" charset="-127"/>
+                <a:ea typeface="맑은 고딕" panose="020B0503020000020004" pitchFamily="50" charset="-127"/>
               </a:rPr>
-              <a:t>기대빈도</a:t>
-            </a:r>
-            <a:r>
-              <a:rPr lang="en-US" altLang="ko-KR" sz="1800" dirty="0">
-                <a:solidFill>
-                  <a:schemeClr val="tx1">
-                    <a:lumMod val="50000"/>
-                    <a:lumOff val="50000"/>
-                  </a:schemeClr>
-                </a:solidFill>
+              <a:t>4. </a:t>
+            </a:r>
+            <a:r>
+              <a:rPr lang="ko-KR" altLang="en-US" dirty="0">
+                <a:latin typeface="맑은 고딕" panose="020B0503020000020004" pitchFamily="50" charset="-127"/>
+                <a:ea typeface="맑은 고딕" panose="020B0503020000020004" pitchFamily="50" charset="-127"/>
               </a:rPr>
-              <a:t>&gt;</a:t>
-            </a:r>
-            <a:endParaRPr lang="ko-KR" altLang="en-US" sz="1800" dirty="0">
-              <a:solidFill>
-                <a:schemeClr val="tx1">
-                  <a:lumMod val="50000"/>
-                  <a:lumOff val="50000"/>
-                </a:schemeClr>
-              </a:solidFill>
-            </a:endParaRPr>
+              <a:t>독립성검정</a:t>
+            </a:r>
           </a:p>
         </p:txBody>
       </p:sp>
@@ -12776,8 +12719,8 @@
         </p:blipFill>
         <p:spPr>
           <a:xfrm>
-            <a:off x="276727" y="2236024"/>
-            <a:ext cx="5555133" cy="4323397"/>
+            <a:off x="536199" y="2161354"/>
+            <a:ext cx="5336301" cy="4153086"/>
           </a:xfrm>
           <a:prstGeom prst="rect">
             <a:avLst/>
@@ -12806,7 +12749,7 @@
         </p:blipFill>
         <p:spPr>
           <a:xfrm>
-            <a:off x="5971592" y="2628369"/>
+            <a:off x="5890312" y="2535659"/>
             <a:ext cx="5775649" cy="3727981"/>
           </a:xfrm>
           <a:prstGeom prst="rect">
@@ -12814,6 +12757,57 @@
           </a:prstGeom>
         </p:spPr>
       </p:pic>
+      <p:sp>
+        <p:nvSpPr>
+          <p:cNvPr id="8" name="바닥글 개체 틀 4">
+            <a:extLst>
+              <a:ext uri="{FF2B5EF4-FFF2-40B4-BE49-F238E27FC236}">
+                <a16:creationId xmlns:a16="http://schemas.microsoft.com/office/drawing/2014/main" id="{0CC4D592-FB9A-E9A5-C929-B4F3A1A88281}"/>
+              </a:ext>
+            </a:extLst>
+          </p:cNvPr>
+          <p:cNvSpPr>
+            <a:spLocks noGrp="1"/>
+          </p:cNvSpPr>
+          <p:nvPr>
+            <p:ph type="ftr" sz="quarter" idx="11"/>
+          </p:nvPr>
+        </p:nvSpPr>
+        <p:spPr>
+          <a:xfrm>
+            <a:off x="4038600" y="6356350"/>
+            <a:ext cx="4114800" cy="365125"/>
+          </a:xfrm>
+        </p:spPr>
+        <p:txBody>
+          <a:bodyPr rtlCol="0"/>
+          <a:lstStyle/>
+          <a:p>
+            <a:pPr rtl="0"/>
+            <a:r>
+              <a:rPr lang="ko-KR" altLang="en-US" dirty="0">
+                <a:latin typeface="맑은 고딕" panose="020B0503020000020004" pitchFamily="50" charset="-127"/>
+                <a:ea typeface="맑은 고딕" panose="020B0503020000020004" pitchFamily="50" charset="-127"/>
+              </a:rPr>
+              <a:t>문제 </a:t>
+            </a:r>
+            <a:r>
+              <a:rPr lang="en-US" altLang="ko-KR" dirty="0">
+                <a:latin typeface="맑은 고딕" panose="020B0503020000020004" pitchFamily="50" charset="-127"/>
+                <a:ea typeface="맑은 고딕" panose="020B0503020000020004" pitchFamily="50" charset="-127"/>
+              </a:rPr>
+              <a:t>4. </a:t>
+            </a:r>
+            <a:r>
+              <a:rPr lang="ko-KR" altLang="en-US" dirty="0">
+                <a:latin typeface="맑은 고딕" panose="020B0503020000020004" pitchFamily="50" charset="-127"/>
+                <a:ea typeface="맑은 고딕" panose="020B0503020000020004" pitchFamily="50" charset="-127"/>
+              </a:rPr>
+              <a:t>독립성검정</a:t>
+            </a:r>
+          </a:p>
+        </p:txBody>
+      </p:sp>
     </p:spTree>
     <p:extLst>
       <p:ext uri="{BB962C8B-B14F-4D97-AF65-F5344CB8AC3E}">
@@ -12889,52 +12883,6 @@
       </p:sp>
       <p:sp>
         <p:nvSpPr>
-          <p:cNvPr id="9" name="바닥글 개체 틀 4">
-            <a:extLst>
-              <a:ext uri="{FF2B5EF4-FFF2-40B4-BE49-F238E27FC236}">
-                <a16:creationId xmlns:a16="http://schemas.microsoft.com/office/drawing/2014/main" id="{948F1280-0C85-421E-BF0E-DB3DAF29F39A}"/>
-              </a:ext>
-            </a:extLst>
-          </p:cNvPr>
-          <p:cNvSpPr>
-            <a:spLocks noGrp="1"/>
-          </p:cNvSpPr>
-          <p:nvPr>
-            <p:ph type="ftr" sz="quarter" idx="11"/>
-          </p:nvPr>
-        </p:nvSpPr>
-        <p:spPr/>
-        <p:txBody>
-          <a:bodyPr rtlCol="0"/>
-          <a:lstStyle/>
-          <a:p>
-            <a:pPr rtl="0"/>
-            <a:r>
-              <a:rPr lang="ko-KR" altLang="en-US" dirty="0">
-                <a:latin typeface="맑은 고딕" panose="020B0503020000020004" pitchFamily="50" charset="-127"/>
-                <a:ea typeface="맑은 고딕" panose="020B0503020000020004" pitchFamily="50" charset="-127"/>
-              </a:rPr>
-              <a:t>문제 </a:t>
-            </a:r>
-            <a:r>
-              <a:rPr lang="en-US" altLang="ko-KR" dirty="0">
-                <a:latin typeface="맑은 고딕" panose="020B0503020000020004" pitchFamily="50" charset="-127"/>
-                <a:ea typeface="맑은 고딕" panose="020B0503020000020004" pitchFamily="50" charset="-127"/>
-              </a:rPr>
-              <a:t>1. </a:t>
-            </a:r>
-            <a:r>
-              <a:rPr lang="ko-KR" altLang="en-US" dirty="0">
-                <a:latin typeface="맑은 고딕" panose="020B0503020000020004" pitchFamily="50" charset="-127"/>
-                <a:ea typeface="맑은 고딕" panose="020B0503020000020004" pitchFamily="50" charset="-127"/>
-              </a:rPr>
-              <a:t>표본조사 체험하기</a:t>
-            </a:r>
-          </a:p>
-        </p:txBody>
-      </p:sp>
-      <p:sp>
-        <p:nvSpPr>
           <p:cNvPr id="10" name="슬라이드 번호 개체 틀 5">
             <a:extLst>
               <a:ext uri="{FF2B5EF4-FFF2-40B4-BE49-F238E27FC236}">
@@ -13051,14 +12999,14 @@
           <p:nvPr>
             <p:extLst>
               <p:ext uri="{D42A27DB-BD31-4B8C-83A1-F6EECF244321}">
-                <p14:modId xmlns:p14="http://schemas.microsoft.com/office/powerpoint/2010/main" val="1351002427"/>
+                <p14:modId xmlns:p14="http://schemas.microsoft.com/office/powerpoint/2010/main" val="4209270675"/>
               </p:ext>
             </p:extLst>
           </p:nvPr>
         </p:nvGraphicFramePr>
         <p:xfrm>
-          <a:off x="998883" y="3948602"/>
-          <a:ext cx="3563619" cy="1225576"/>
+          <a:off x="674422" y="3921485"/>
+          <a:ext cx="4049977" cy="1549228"/>
         </p:xfrm>
         <a:graphic>
           <a:graphicData uri="http://schemas.openxmlformats.org/drawingml/2006/table">
@@ -13067,21 +13015,21 @@
                 <a:tableStyleId>{5C22544A-7EE6-4342-B048-85BDC9FD1C3A}</a:tableStyleId>
               </a:tblPr>
               <a:tblGrid>
-                <a:gridCol w="679365">
+                <a:gridCol w="772084">
                   <a:extLst>
                     <a:ext uri="{9D8B030D-6E8A-4147-A177-3AD203B41FA5}">
                       <a16:colId xmlns:a16="http://schemas.microsoft.com/office/drawing/2014/main" val="2412194708"/>
                     </a:ext>
                   </a:extLst>
                 </a:gridCol>
-                <a:gridCol w="1385088">
+                <a:gridCol w="1574123">
                   <a:extLst>
                     <a:ext uri="{9D8B030D-6E8A-4147-A177-3AD203B41FA5}">
                       <a16:colId xmlns:a16="http://schemas.microsoft.com/office/drawing/2014/main" val="628865676"/>
                     </a:ext>
                   </a:extLst>
                 </a:gridCol>
-                <a:gridCol w="1499166">
+                <a:gridCol w="1703770">
                   <a:extLst>
                     <a:ext uri="{9D8B030D-6E8A-4147-A177-3AD203B41FA5}">
                       <a16:colId xmlns:a16="http://schemas.microsoft.com/office/drawing/2014/main" val="432222477"/>
@@ -13089,7 +13037,7 @@
                   </a:extLst>
                 </a:gridCol>
               </a:tblGrid>
-              <a:tr h="302783">
+              <a:tr h="387307">
                 <a:tc>
                   <a:txBody>
                     <a:bodyPr/>
@@ -13135,7 +13083,7 @@
                   </a:ext>
                 </a:extLst>
               </a:tr>
-              <a:tr h="302783">
+              <a:tr h="387307">
                 <a:tc>
                   <a:txBody>
                     <a:bodyPr/>
@@ -13190,7 +13138,7 @@
                   </a:ext>
                 </a:extLst>
               </a:tr>
-              <a:tr h="302783">
+              <a:tr h="387307">
                 <a:tc>
                   <a:txBody>
                     <a:bodyPr/>
@@ -13245,7 +13193,7 @@
                   </a:ext>
                 </a:extLst>
               </a:tr>
-              <a:tr h="302783">
+              <a:tr h="387307">
                 <a:tc>
                   <a:txBody>
                     <a:bodyPr/>
@@ -13320,7 +13268,7 @@
         </p:nvSpPr>
         <p:spPr>
           <a:xfrm>
-            <a:off x="1870936" y="3338686"/>
+            <a:off x="1789654" y="3367487"/>
             <a:ext cx="1819511" cy="553998"/>
           </a:xfrm>
           <a:prstGeom prst="rect">
@@ -13525,6 +13473,57 @@
             <a:endParaRPr lang="ko-KR" altLang="ko-KR" sz="1500" b="0" dirty="0">
               <a:effectLst/>
             </a:endParaRPr>
+          </a:p>
+        </p:txBody>
+      </p:sp>
+      <p:sp>
+        <p:nvSpPr>
+          <p:cNvPr id="20" name="바닥글 개체 틀 4">
+            <a:extLst>
+              <a:ext uri="{FF2B5EF4-FFF2-40B4-BE49-F238E27FC236}">
+                <a16:creationId xmlns:a16="http://schemas.microsoft.com/office/drawing/2014/main" id="{86326B41-82A3-B48C-3C37-AE8E2E295759}"/>
+              </a:ext>
+            </a:extLst>
+          </p:cNvPr>
+          <p:cNvSpPr>
+            <a:spLocks noGrp="1"/>
+          </p:cNvSpPr>
+          <p:nvPr>
+            <p:ph type="ftr" sz="quarter" idx="11"/>
+          </p:nvPr>
+        </p:nvSpPr>
+        <p:spPr>
+          <a:xfrm>
+            <a:off x="4038600" y="6356350"/>
+            <a:ext cx="4114800" cy="365125"/>
+          </a:xfrm>
+        </p:spPr>
+        <p:txBody>
+          <a:bodyPr rtlCol="0"/>
+          <a:lstStyle/>
+          <a:p>
+            <a:pPr rtl="0"/>
+            <a:r>
+              <a:rPr lang="ko-KR" altLang="en-US" dirty="0">
+                <a:latin typeface="맑은 고딕" panose="020B0503020000020004" pitchFamily="50" charset="-127"/>
+                <a:ea typeface="맑은 고딕" panose="020B0503020000020004" pitchFamily="50" charset="-127"/>
+              </a:rPr>
+              <a:t>문제 </a:t>
+            </a:r>
+            <a:r>
+              <a:rPr lang="en-US" altLang="ko-KR" dirty="0">
+                <a:latin typeface="맑은 고딕" panose="020B0503020000020004" pitchFamily="50" charset="-127"/>
+                <a:ea typeface="맑은 고딕" panose="020B0503020000020004" pitchFamily="50" charset="-127"/>
+              </a:rPr>
+              <a:t>4. </a:t>
+            </a:r>
+            <a:r>
+              <a:rPr lang="ko-KR" altLang="en-US" dirty="0">
+                <a:latin typeface="맑은 고딕" panose="020B0503020000020004" pitchFamily="50" charset="-127"/>
+                <a:ea typeface="맑은 고딕" panose="020B0503020000020004" pitchFamily="50" charset="-127"/>
+              </a:rPr>
+              <a:t>독립성검정</a:t>
+            </a:r>
           </a:p>
         </p:txBody>
       </p:sp>
@@ -13566,52 +13565,6 @@
       </p:grpSpPr>
       <p:sp>
         <p:nvSpPr>
-          <p:cNvPr id="9" name="바닥글 개체 틀 4">
-            <a:extLst>
-              <a:ext uri="{FF2B5EF4-FFF2-40B4-BE49-F238E27FC236}">
-                <a16:creationId xmlns:a16="http://schemas.microsoft.com/office/drawing/2014/main" id="{CA9B9A07-9D5C-15C7-9CE1-7989B2E68311}"/>
-              </a:ext>
-            </a:extLst>
-          </p:cNvPr>
-          <p:cNvSpPr>
-            <a:spLocks noGrp="1"/>
-          </p:cNvSpPr>
-          <p:nvPr>
-            <p:ph type="ftr" sz="quarter" idx="11"/>
-          </p:nvPr>
-        </p:nvSpPr>
-        <p:spPr/>
-        <p:txBody>
-          <a:bodyPr rtlCol="0"/>
-          <a:lstStyle/>
-          <a:p>
-            <a:pPr rtl="0"/>
-            <a:r>
-              <a:rPr lang="ko-KR" altLang="en-US" dirty="0">
-                <a:latin typeface="맑은 고딕" panose="020B0503020000020004" pitchFamily="50" charset="-127"/>
-                <a:ea typeface="맑은 고딕" panose="020B0503020000020004" pitchFamily="50" charset="-127"/>
-              </a:rPr>
-              <a:t>문제 </a:t>
-            </a:r>
-            <a:r>
-              <a:rPr lang="en-US" altLang="ko-KR" dirty="0">
-                <a:latin typeface="맑은 고딕" panose="020B0503020000020004" pitchFamily="50" charset="-127"/>
-                <a:ea typeface="맑은 고딕" panose="020B0503020000020004" pitchFamily="50" charset="-127"/>
-              </a:rPr>
-              <a:t>1. </a:t>
-            </a:r>
-            <a:r>
-              <a:rPr lang="ko-KR" altLang="en-US" dirty="0">
-                <a:latin typeface="맑은 고딕" panose="020B0503020000020004" pitchFamily="50" charset="-127"/>
-                <a:ea typeface="맑은 고딕" panose="020B0503020000020004" pitchFamily="50" charset="-127"/>
-              </a:rPr>
-              <a:t>표본조사 체험하기</a:t>
-            </a:r>
-          </a:p>
-        </p:txBody>
-      </p:sp>
-      <p:sp>
-        <p:nvSpPr>
           <p:cNvPr id="10" name="슬라이드 번호 개체 틀 5">
             <a:extLst>
               <a:ext uri="{FF2B5EF4-FFF2-40B4-BE49-F238E27FC236}">
@@ -13787,19 +13740,7 @@
               <a:rPr lang="ko-KR" altLang="ko-KR" sz="1500" b="0" dirty="0">
                 <a:effectLst/>
               </a:rPr>
-              <a:t> 통계량들의 분포(</a:t>
-            </a:r>
-            <a:r>
-              <a:rPr lang="ko-KR" altLang="ko-KR" sz="1500" b="0" dirty="0" err="1">
-                <a:effectLst/>
-              </a:rPr>
-              <a:t>카이제곱</a:t>
-            </a:r>
-            <a:r>
-              <a:rPr lang="ko-KR" altLang="ko-KR" sz="1500" b="0" dirty="0">
-                <a:effectLst/>
-              </a:rPr>
-              <a:t> 분포에 대한 시뮬레이션 근사)를 나타낸다.</a:t>
+              <a:t> 통계량들의 분포를 나타낸다.</a:t>
             </a:r>
             <a:endParaRPr lang="en-US" altLang="ko-KR" sz="1500" b="0" dirty="0">
               <a:effectLst/>
@@ -13837,7 +13778,25 @@
             </a:r>
             <a:r>
               <a:rPr lang="ko-KR" altLang="ko-KR" sz="1500" dirty="0"/>
-              <a:t> 그 범위를 훨씬 벗어난 오른쪽 끝에 위치해 있다. 즉 두 변수가 독립이라면 이런 값이 나오는 건 거의 불가능에 가깝다.</a:t>
+              <a:t> 그 범위를 훨씬 벗어난 오른쪽 끝에 위치해 있다. </a:t>
+            </a:r>
+            <a:endParaRPr lang="en-US" altLang="ko-KR" sz="1500" dirty="0"/>
+          </a:p>
+          <a:p>
+            <a:pPr marL="285750" indent="-285750">
+              <a:buFont typeface="Wingdings" panose="05000000000000000000" pitchFamily="2" charset="2"/>
+              <a:buChar char="à"/>
+            </a:pPr>
+            <a:endParaRPr lang="en-US" altLang="ko-KR" sz="1500" dirty="0"/>
+          </a:p>
+          <a:p>
+            <a:pPr marL="285750" indent="-285750">
+              <a:buFont typeface="Wingdings" panose="05000000000000000000" pitchFamily="2" charset="2"/>
+              <a:buChar char="à"/>
+            </a:pPr>
+            <a:r>
+              <a:rPr lang="ko-KR" altLang="ko-KR" sz="1500" dirty="0"/>
+              <a:t>즉 두 변수가 독립이라면 이런 값이 나오는 건 거의 불가능에 가깝다.</a:t>
             </a:r>
           </a:p>
           <a:p>
@@ -13910,6 +13869,57 @@
               <a:rPr lang="en-US" altLang="ko-KR" sz="2700"/>
             </a:br>
             <a:endParaRPr lang="ko-KR" altLang="en-US" sz="2700" dirty="0"/>
+          </a:p>
+        </p:txBody>
+      </p:sp>
+      <p:sp>
+        <p:nvSpPr>
+          <p:cNvPr id="21" name="바닥글 개체 틀 4">
+            <a:extLst>
+              <a:ext uri="{FF2B5EF4-FFF2-40B4-BE49-F238E27FC236}">
+                <a16:creationId xmlns:a16="http://schemas.microsoft.com/office/drawing/2014/main" id="{F91245D2-04D3-A2E1-C527-DA49B08F3BB6}"/>
+              </a:ext>
+            </a:extLst>
+          </p:cNvPr>
+          <p:cNvSpPr>
+            <a:spLocks noGrp="1"/>
+          </p:cNvSpPr>
+          <p:nvPr>
+            <p:ph type="ftr" sz="quarter" idx="11"/>
+          </p:nvPr>
+        </p:nvSpPr>
+        <p:spPr>
+          <a:xfrm>
+            <a:off x="4038600" y="6356350"/>
+            <a:ext cx="4114800" cy="365125"/>
+          </a:xfrm>
+        </p:spPr>
+        <p:txBody>
+          <a:bodyPr rtlCol="0"/>
+          <a:lstStyle/>
+          <a:p>
+            <a:pPr rtl="0"/>
+            <a:r>
+              <a:rPr lang="ko-KR" altLang="en-US" dirty="0">
+                <a:latin typeface="맑은 고딕" panose="020B0503020000020004" pitchFamily="50" charset="-127"/>
+                <a:ea typeface="맑은 고딕" panose="020B0503020000020004" pitchFamily="50" charset="-127"/>
+              </a:rPr>
+              <a:t>문제 </a:t>
+            </a:r>
+            <a:r>
+              <a:rPr lang="en-US" altLang="ko-KR" dirty="0">
+                <a:latin typeface="맑은 고딕" panose="020B0503020000020004" pitchFamily="50" charset="-127"/>
+                <a:ea typeface="맑은 고딕" panose="020B0503020000020004" pitchFamily="50" charset="-127"/>
+              </a:rPr>
+              <a:t>4. </a:t>
+            </a:r>
+            <a:r>
+              <a:rPr lang="ko-KR" altLang="en-US" dirty="0">
+                <a:latin typeface="맑은 고딕" panose="020B0503020000020004" pitchFamily="50" charset="-127"/>
+                <a:ea typeface="맑은 고딕" panose="020B0503020000020004" pitchFamily="50" charset="-127"/>
+              </a:rPr>
+              <a:t>독립성검정</a:t>
+            </a:r>
           </a:p>
         </p:txBody>
       </p:sp>
@@ -14030,7 +14040,7 @@
           <a:p>
             <a:r>
               <a:rPr lang="en-US" altLang="ko-KR" sz="1650" b="1" dirty="0"/>
-              <a:t>A4: </a:t>
+              <a:t>A4:  </a:t>
             </a:r>
             <a:r>
               <a:rPr lang="ko-KR" altLang="ko-KR" sz="1500" dirty="0" err="1"/>
@@ -14045,7 +14055,7 @@
           <a:p>
             <a:r>
               <a:rPr lang="en-US" altLang="ko-KR" sz="1500" dirty="0"/>
-              <a:t>        </a:t>
+              <a:t>         </a:t>
             </a:r>
             <a:r>
               <a:rPr lang="ko-KR" altLang="ko-KR" sz="1500" dirty="0"/>
@@ -14078,7 +14088,7 @@
         <p:spPr>
           <a:xfrm>
             <a:off x="518159" y="3424817"/>
-            <a:ext cx="11058061" cy="3351687"/>
+            <a:ext cx="11058061" cy="3036216"/>
           </a:xfrm>
           <a:prstGeom prst="rect">
             <a:avLst/>
@@ -14165,21 +14175,29 @@
           </a:p>
           <a:p>
             <a:r>
+              <a:rPr lang="ko-KR" altLang="en-US" sz="1500" dirty="0"/>
+              <a:t>         따라서 다음 </a:t>
+            </a:r>
+            <a:r>
               <a:rPr lang="ko-KR" altLang="ko-KR" sz="1500" dirty="0"/>
-              <a:t>연령대와 선호 장르 간 유의미한 연관성이 확인된 만큼, 영화관은</a:t>
+              <a:t>세 방향으로 마케팅 전략을 세울 수 있다.</a:t>
             </a:r>
             <a:endParaRPr lang="en-US" altLang="ko-KR" sz="1500" dirty="0"/>
           </a:p>
           <a:p>
-            <a:endParaRPr lang="en-US" altLang="ko-KR" sz="1500" dirty="0"/>
+            <a:endParaRPr lang="en-US" altLang="ko-KR" sz="500" dirty="0"/>
           </a:p>
           <a:p>
             <a:pPr>
               <a:lnSpc>
-                <a:spcPct val="110000"/>
+                <a:spcPct val="120000"/>
               </a:lnSpc>
             </a:pPr>
             <a:r>
+              <a:rPr lang="en-US" altLang="ko-KR" sz="1500" dirty="0"/>
+              <a:t>           </a:t>
+            </a:r>
+            <a:r>
               <a:rPr lang="ko-KR" altLang="ko-KR" sz="1500" dirty="0"/>
               <a:t>① 연령대별 타겟 프로모션(20대-액션 </a:t>
             </a:r>
@@ -14189,17 +14207,33 @@
             </a:r>
             <a:r>
               <a:rPr lang="ko-KR" altLang="ko-KR" sz="1500" dirty="0"/>
-              <a:t> 이벤트, 40대-로맨스·커플 패키지)</a:t>
+              <a:t> 이벤트</a:t>
+            </a:r>
+            <a:r>
+              <a:rPr lang="en-US" altLang="ko-KR" sz="1500" dirty="0"/>
+              <a:t> </a:t>
+            </a:r>
+            <a:r>
+              <a:rPr lang="ko-KR" altLang="en-US" sz="1500" dirty="0"/>
+              <a:t>등</a:t>
+            </a:r>
+            <a:r>
+              <a:rPr lang="ko-KR" altLang="ko-KR" sz="1500" dirty="0"/>
+              <a:t>)</a:t>
             </a:r>
             <a:endParaRPr lang="en-US" altLang="ko-KR" sz="1500" dirty="0"/>
           </a:p>
           <a:p>
             <a:pPr>
               <a:lnSpc>
-                <a:spcPct val="110000"/>
+                <a:spcPct val="120000"/>
               </a:lnSpc>
             </a:pPr>
             <a:r>
+              <a:rPr lang="en-US" altLang="ko-KR" sz="1500" dirty="0"/>
+              <a:t>           </a:t>
+            </a:r>
+            <a:r>
               <a:rPr lang="ko-KR" altLang="ko-KR" sz="1500" dirty="0"/>
               <a:t>② </a:t>
             </a:r>
@@ -14216,31 +14250,20 @@
           <a:p>
             <a:pPr>
               <a:lnSpc>
-                <a:spcPct val="110000"/>
+                <a:spcPct val="120000"/>
               </a:lnSpc>
             </a:pPr>
             <a:r>
+              <a:rPr lang="en-US" altLang="ko-KR" sz="1500" dirty="0"/>
+              <a:t>           </a:t>
+            </a:r>
+            <a:r>
               <a:rPr lang="ko-KR" altLang="ko-KR" sz="1500" dirty="0"/>
               <a:t>③ 데이터 기반 개인화 추천(연령대별 선호 데이터를 멤버십에 반영한 맞춤 추천)</a:t>
             </a:r>
             <a:endParaRPr lang="en-US" altLang="ko-KR" sz="1500" dirty="0"/>
           </a:p>
           <a:p>
-            <a:endParaRPr lang="en-US" altLang="ko-KR" sz="1500" dirty="0"/>
-          </a:p>
-          <a:p>
-            <a:r>
-              <a:rPr lang="ko-KR" altLang="ko-KR" sz="1500" dirty="0"/>
-              <a:t>이라는</a:t>
-            </a:r>
-            <a:r>
-              <a:rPr lang="en-US" altLang="ko-KR" sz="1500" dirty="0"/>
-              <a:t> </a:t>
-            </a:r>
-            <a:r>
-              <a:rPr lang="ko-KR" altLang="ko-KR" sz="1500" dirty="0"/>
-              <a:t>세 방향으로 마케팅 전략을 세울 수 있다.</a:t>
-            </a:r>
             <a:endParaRPr lang="en-US" altLang="ko-KR" sz="1500" dirty="0"/>
           </a:p>
         </p:txBody>
@@ -14347,6 +14370,57 @@
               <a:rPr lang="en-US" altLang="ko-KR" sz="2700"/>
             </a:br>
             <a:endParaRPr lang="ko-KR" altLang="en-US" sz="2700" dirty="0"/>
+          </a:p>
+        </p:txBody>
+      </p:sp>
+      <p:sp>
+        <p:nvSpPr>
+          <p:cNvPr id="20" name="바닥글 개체 틀 4">
+            <a:extLst>
+              <a:ext uri="{FF2B5EF4-FFF2-40B4-BE49-F238E27FC236}">
+                <a16:creationId xmlns:a16="http://schemas.microsoft.com/office/drawing/2014/main" id="{0E05E690-8793-E732-B103-945FD423B902}"/>
+              </a:ext>
+            </a:extLst>
+          </p:cNvPr>
+          <p:cNvSpPr>
+            <a:spLocks noGrp="1"/>
+          </p:cNvSpPr>
+          <p:nvPr>
+            <p:ph type="ftr" sz="quarter" idx="11"/>
+          </p:nvPr>
+        </p:nvSpPr>
+        <p:spPr>
+          <a:xfrm>
+            <a:off x="4038600" y="6356350"/>
+            <a:ext cx="4114800" cy="365125"/>
+          </a:xfrm>
+        </p:spPr>
+        <p:txBody>
+          <a:bodyPr rtlCol="0"/>
+          <a:lstStyle/>
+          <a:p>
+            <a:pPr rtl="0"/>
+            <a:r>
+              <a:rPr lang="ko-KR" altLang="en-US" dirty="0">
+                <a:latin typeface="맑은 고딕" panose="020B0503020000020004" pitchFamily="50" charset="-127"/>
+                <a:ea typeface="맑은 고딕" panose="020B0503020000020004" pitchFamily="50" charset="-127"/>
+              </a:rPr>
+              <a:t>문제 </a:t>
+            </a:r>
+            <a:r>
+              <a:rPr lang="en-US" altLang="ko-KR" dirty="0">
+                <a:latin typeface="맑은 고딕" panose="020B0503020000020004" pitchFamily="50" charset="-127"/>
+                <a:ea typeface="맑은 고딕" panose="020B0503020000020004" pitchFamily="50" charset="-127"/>
+              </a:rPr>
+              <a:t>4. </a:t>
+            </a:r>
+            <a:r>
+              <a:rPr lang="ko-KR" altLang="en-US" dirty="0">
+                <a:latin typeface="맑은 고딕" panose="020B0503020000020004" pitchFamily="50" charset="-127"/>
+                <a:ea typeface="맑은 고딕" panose="020B0503020000020004" pitchFamily="50" charset="-127"/>
+              </a:rPr>
+              <a:t>독립성검정</a:t>
+            </a:r>
           </a:p>
         </p:txBody>
       </p:sp>
@@ -14475,7 +14549,7 @@
               <a:t>발표</a:t>
             </a:r>
             <a:r>
-              <a:rPr lang="en-US" altLang="ko-KR"/>
+              <a:rPr lang="en-US" altLang="ko-KR" dirty="0"/>
               <a:t>), </a:t>
             </a:r>
             <a:r>

--- a/D014/문제4_발표자료(C2).pptx
+++ b/D014/문제4_발표자료(C2).pptx
@@ -12647,7 +12647,7 @@
             </a:pPr>
             <a:r>
               <a:rPr lang="en-US" altLang="ko-KR" sz="2400" dirty="0"/>
-              <a:t>Q3. </a:t>
+              <a:t>Q3, Q4: </a:t>
             </a:r>
             <a:r>
               <a:rPr lang="ko-KR" altLang="ko-KR" sz="2400" dirty="0"/>
@@ -12749,7 +12749,7 @@
         </p:blipFill>
         <p:spPr>
           <a:xfrm>
-            <a:off x="5890312" y="2535659"/>
+            <a:off x="5890312" y="2327319"/>
             <a:ext cx="5775649" cy="3727981"/>
           </a:xfrm>
           <a:prstGeom prst="rect">
@@ -12805,6 +12805,108 @@
               </a:rPr>
               <a:t>독립성검정</a:t>
             </a:r>
+          </a:p>
+        </p:txBody>
+      </p:sp>
+      <p:sp>
+        <p:nvSpPr>
+          <p:cNvPr id="5" name="TextBox 4">
+            <a:extLst>
+              <a:ext uri="{FF2B5EF4-FFF2-40B4-BE49-F238E27FC236}">
+                <a16:creationId xmlns:a16="http://schemas.microsoft.com/office/drawing/2014/main" id="{F2ED6998-E359-68A6-E311-B18DC20039F7}"/>
+              </a:ext>
+            </a:extLst>
+          </p:cNvPr>
+          <p:cNvSpPr txBox="1"/>
+          <p:nvPr/>
+        </p:nvSpPr>
+        <p:spPr>
+          <a:xfrm>
+            <a:off x="6674735" y="6080373"/>
+            <a:ext cx="6094070" cy="246221"/>
+          </a:xfrm>
+          <a:prstGeom prst="rect">
+            <a:avLst/>
+          </a:prstGeom>
+          <a:noFill/>
+        </p:spPr>
+        <p:txBody>
+          <a:bodyPr wrap="square">
+            <a:spAutoFit/>
+          </a:bodyPr>
+          <a:lstStyle/>
+          <a:p>
+            <a:r>
+              <a:rPr lang="en-US" altLang="ko-KR" sz="1000" b="0" i="0" dirty="0">
+                <a:effectLst/>
+                <a:latin typeface="Anthropic Sans"/>
+              </a:rPr>
+              <a:t>( </a:t>
+            </a:r>
+            <a:r>
+              <a:rPr lang="ko-KR" altLang="ko-KR" sz="1000" b="0" i="0" dirty="0">
+                <a:effectLst/>
+                <a:latin typeface="Anthropic Sans"/>
+              </a:rPr>
+              <a:t>시뮬레이션 기반 </a:t>
+            </a:r>
+            <a:r>
+              <a:rPr lang="ko-KR" altLang="ko-KR" sz="1000" b="0" i="0" dirty="0" err="1">
+                <a:effectLst/>
+                <a:latin typeface="Anthropic Sans"/>
+              </a:rPr>
+              <a:t>p-value</a:t>
+            </a:r>
+            <a:r>
+              <a:rPr lang="ko-KR" altLang="ko-KR" sz="1000" b="0" i="0" dirty="0">
+                <a:effectLst/>
+                <a:latin typeface="Anthropic Sans"/>
+              </a:rPr>
+              <a:t>: 0.00000000 </a:t>
+            </a:r>
+            <a:r>
+              <a:rPr lang="en-US" altLang="ko-KR" sz="1000" b="0" i="0" dirty="0">
+                <a:effectLst/>
+                <a:latin typeface="Anthropic Sans"/>
+              </a:rPr>
+              <a:t>/ </a:t>
+            </a:r>
+            <a:r>
+              <a:rPr lang="ko-KR" altLang="ko-KR" sz="1000" b="0" i="0" dirty="0" err="1">
+                <a:effectLst/>
+                <a:latin typeface="Anthropic Sans"/>
+              </a:rPr>
+              <a:t>카이제곱</a:t>
+            </a:r>
+            <a:r>
+              <a:rPr lang="ko-KR" altLang="ko-KR" sz="1000" b="0" i="0" dirty="0">
+                <a:effectLst/>
+                <a:latin typeface="Anthropic Sans"/>
+              </a:rPr>
+              <a:t> 검정 </a:t>
+            </a:r>
+            <a:r>
+              <a:rPr lang="ko-KR" altLang="ko-KR" sz="1000" b="0" i="0" dirty="0" err="1">
+                <a:effectLst/>
+                <a:latin typeface="Anthropic Sans"/>
+              </a:rPr>
+              <a:t>p-value</a:t>
+            </a:r>
+            <a:r>
+              <a:rPr lang="ko-KR" altLang="ko-KR" sz="1000" b="0" i="0" dirty="0">
+                <a:effectLst/>
+                <a:latin typeface="Anthropic Sans"/>
+              </a:rPr>
+              <a:t>: 0.00000143</a:t>
+            </a:r>
+            <a:r>
+              <a:rPr lang="en-US" altLang="ko-KR" sz="1000" b="0" i="0" dirty="0">
+                <a:effectLst/>
+                <a:latin typeface="Anthropic Sans"/>
+              </a:rPr>
+              <a:t>) </a:t>
+            </a:r>
+            <a:endParaRPr lang="ko-KR" altLang="en-US" sz="1000" dirty="0"/>
           </a:p>
         </p:txBody>
       </p:sp>
@@ -13694,7 +13796,7 @@
         </p:nvSpPr>
         <p:spPr>
           <a:xfrm>
-            <a:off x="5720403" y="3580604"/>
+            <a:off x="5650953" y="3592179"/>
             <a:ext cx="6098720" cy="2400657"/>
           </a:xfrm>
           <a:prstGeom prst="rect">
@@ -15392,12 +15494,12 @@
 </file>
 
 <file path=customXml/item1.xml><?xml version="1.0" encoding="utf-8"?>
-<p:properties xmlns:p="http://schemas.microsoft.com/office/2006/metadata/properties" xmlns:xsi="http://www.w3.org/2001/XMLSchema-instance" xmlns:pc="http://schemas.microsoft.com/office/infopath/2007/PartnerControls">
-  <documentManagement>
-    <Status xmlns="71af3243-3dd4-4a8d-8c0d-dd76da1f02a5">Not started</Status>
-    <MediaServiceKeyPoints xmlns="71af3243-3dd4-4a8d-8c0d-dd76da1f02a5" xsi:nil="true"/>
-  </documentManagement>
-</p:properties>
+<?mso-contentType ?>
+<FormTemplates xmlns="http://schemas.microsoft.com/sharepoint/v3/contenttype/forms">
+  <Display>DocumentLibraryForm</Display>
+  <Edit>DocumentLibraryForm</Edit>
+  <New>DocumentLibraryForm</New>
+</FormTemplates>
 </file>
 
 <file path=customXml/item2.xml><?xml version="1.0" encoding="utf-8"?>
@@ -15622,20 +15724,18 @@
 </file>
 
 <file path=customXml/item3.xml><?xml version="1.0" encoding="utf-8"?>
-<?mso-contentType ?>
-<FormTemplates xmlns="http://schemas.microsoft.com/sharepoint/v3/contenttype/forms">
-  <Display>DocumentLibraryForm</Display>
-  <Edit>DocumentLibraryForm</Edit>
-  <New>DocumentLibraryForm</New>
-</FormTemplates>
+<p:properties xmlns:p="http://schemas.microsoft.com/office/2006/metadata/properties" xmlns:xsi="http://www.w3.org/2001/XMLSchema-instance" xmlns:pc="http://schemas.microsoft.com/office/infopath/2007/PartnerControls">
+  <documentManagement>
+    <Status xmlns="71af3243-3dd4-4a8d-8c0d-dd76da1f02a5">Not started</Status>
+    <MediaServiceKeyPoints xmlns="71af3243-3dd4-4a8d-8c0d-dd76da1f02a5" xsi:nil="true"/>
+  </documentManagement>
+</p:properties>
 </file>
 
 <file path=customXml/itemProps1.xml><?xml version="1.0" encoding="utf-8"?>
-<ds:datastoreItem xmlns:ds="http://schemas.openxmlformats.org/officeDocument/2006/customXml" ds:itemID="{290D7697-8E53-4EA8-8CBB-9C19575257BF}">
+<ds:datastoreItem xmlns:ds="http://schemas.openxmlformats.org/officeDocument/2006/customXml" ds:itemID="{B927DC71-2909-427C-BDB0-3E47E2101517}">
   <ds:schemaRefs>
-    <ds:schemaRef ds:uri="http://schemas.microsoft.com/office/2006/metadata/properties"/>
-    <ds:schemaRef ds:uri="http://schemas.microsoft.com/office/infopath/2007/PartnerControls"/>
-    <ds:schemaRef ds:uri="71af3243-3dd4-4a8d-8c0d-dd76da1f02a5"/>
+    <ds:schemaRef ds:uri="http://schemas.microsoft.com/sharepoint/v3/contenttype/forms"/>
   </ds:schemaRefs>
 </ds:datastoreItem>
 </file>
@@ -15660,9 +15760,11 @@
 </file>
 
 <file path=customXml/itemProps3.xml><?xml version="1.0" encoding="utf-8"?>
-<ds:datastoreItem xmlns:ds="http://schemas.openxmlformats.org/officeDocument/2006/customXml" ds:itemID="{B927DC71-2909-427C-BDB0-3E47E2101517}">
+<ds:datastoreItem xmlns:ds="http://schemas.openxmlformats.org/officeDocument/2006/customXml" ds:itemID="{290D7697-8E53-4EA8-8CBB-9C19575257BF}">
   <ds:schemaRefs>
-    <ds:schemaRef ds:uri="http://schemas.microsoft.com/sharepoint/v3/contenttype/forms"/>
+    <ds:schemaRef ds:uri="http://schemas.microsoft.com/office/2006/metadata/properties"/>
+    <ds:schemaRef ds:uri="http://schemas.microsoft.com/office/infopath/2007/PartnerControls"/>
+    <ds:schemaRef ds:uri="71af3243-3dd4-4a8d-8c0d-dd76da1f02a5"/>
   </ds:schemaRefs>
 </ds:datastoreItem>
 </file>
--- a/D014/문제4_발표자료(C2).pptx
+++ b/D014/문제4_발표자료(C2).pptx
@@ -14142,7 +14142,7 @@
           <a:p>
             <a:r>
               <a:rPr lang="en-US" altLang="ko-KR" sz="1650" b="1" dirty="0"/>
-              <a:t>A4:  </a:t>
+              <a:t>A3:  </a:t>
             </a:r>
             <a:r>
               <a:rPr lang="ko-KR" altLang="ko-KR" sz="1500" dirty="0" err="1"/>
@@ -15494,15 +15494,6 @@
 </file>
 
 <file path=customXml/item1.xml><?xml version="1.0" encoding="utf-8"?>
-<?mso-contentType ?>
-<FormTemplates xmlns="http://schemas.microsoft.com/sharepoint/v3/contenttype/forms">
-  <Display>DocumentLibraryForm</Display>
-  <Edit>DocumentLibraryForm</Edit>
-  <New>DocumentLibraryForm</New>
-</FormTemplates>
-</file>
-
-<file path=customXml/item2.xml><?xml version="1.0" encoding="utf-8"?>
 <ct:contentTypeSchema xmlns:ct="http://schemas.microsoft.com/office/2006/metadata/contentType" xmlns:ma="http://schemas.microsoft.com/office/2006/metadata/properties/metaAttributes" ct:_="" ma:_="" ma:contentTypeName="Document" ma:contentTypeID="0x01010079F111ED35F8CC479449609E8A0923A6" ma:contentTypeVersion="12" ma:contentTypeDescription="Create a new document." ma:contentTypeScope="" ma:versionID="426e97fa315356fffbdcd9876fe988c2">
   <xsd:schema xmlns:xsd="http://www.w3.org/2001/XMLSchema" xmlns:xs="http://www.w3.org/2001/XMLSchema" xmlns:p="http://schemas.microsoft.com/office/2006/metadata/properties" xmlns:ns2="71af3243-3dd4-4a8d-8c0d-dd76da1f02a5" xmlns:ns3="16c05727-aa75-4e4a-9b5f-8a80a1165891" targetNamespace="http://schemas.microsoft.com/office/2006/metadata/properties" ma:root="true" ma:fieldsID="14b8f0def80e6d70ce3def20c90759ae" ns2:_="" ns3:_="">
     <xsd:import namespace="71af3243-3dd4-4a8d-8c0d-dd76da1f02a5"/>
@@ -15723,6 +15714,15 @@
 </ct:contentTypeSchema>
 </file>
 
+<file path=customXml/item2.xml><?xml version="1.0" encoding="utf-8"?>
+<?mso-contentType ?>
+<FormTemplates xmlns="http://schemas.microsoft.com/sharepoint/v3/contenttype/forms">
+  <Display>DocumentLibraryForm</Display>
+  <Edit>DocumentLibraryForm</Edit>
+  <New>DocumentLibraryForm</New>
+</FormTemplates>
+</file>
+
 <file path=customXml/item3.xml><?xml version="1.0" encoding="utf-8"?>
 <p:properties xmlns:p="http://schemas.microsoft.com/office/2006/metadata/properties" xmlns:xsi="http://www.w3.org/2001/XMLSchema-instance" xmlns:pc="http://schemas.microsoft.com/office/infopath/2007/PartnerControls">
   <documentManagement>
@@ -15733,14 +15733,6 @@
 </file>
 
 <file path=customXml/itemProps1.xml><?xml version="1.0" encoding="utf-8"?>
-<ds:datastoreItem xmlns:ds="http://schemas.openxmlformats.org/officeDocument/2006/customXml" ds:itemID="{B927DC71-2909-427C-BDB0-3E47E2101517}">
-  <ds:schemaRefs>
-    <ds:schemaRef ds:uri="http://schemas.microsoft.com/sharepoint/v3/contenttype/forms"/>
-  </ds:schemaRefs>
-</ds:datastoreItem>
-</file>
-
-<file path=customXml/itemProps2.xml><?xml version="1.0" encoding="utf-8"?>
 <ds:datastoreItem xmlns:ds="http://schemas.openxmlformats.org/officeDocument/2006/customXml" ds:itemID="{1DF0A252-5923-47A2-A53A-F9BF72908919}">
   <ds:schemaRefs>
     <ds:schemaRef ds:uri="http://schemas.microsoft.com/office/2006/metadata/contentType"/>
@@ -15759,6 +15751,14 @@
 </ds:datastoreItem>
 </file>
 
+<file path=customXml/itemProps2.xml><?xml version="1.0" encoding="utf-8"?>
+<ds:datastoreItem xmlns:ds="http://schemas.openxmlformats.org/officeDocument/2006/customXml" ds:itemID="{B927DC71-2909-427C-BDB0-3E47E2101517}">
+  <ds:schemaRefs>
+    <ds:schemaRef ds:uri="http://schemas.microsoft.com/sharepoint/v3/contenttype/forms"/>
+  </ds:schemaRefs>
+</ds:datastoreItem>
+</file>
+
 <file path=customXml/itemProps3.xml><?xml version="1.0" encoding="utf-8"?>
 <ds:datastoreItem xmlns:ds="http://schemas.openxmlformats.org/officeDocument/2006/customXml" ds:itemID="{290D7697-8E53-4EA8-8CBB-9C19575257BF}">
   <ds:schemaRefs>
